--- a/output/Introduction_개발일정.pptx
+++ b/output/Introduction_개발일정.pptx
@@ -3536,7 +3536,9 @@
             <a:ext cx="1800582" cy="1194067"/>
           </a:xfrm>
           <a:prstGeom prst="homePlate">
-            <a:avLst/>
+            <a:avLst>
+              <a:gd name="adj" fmla="val 50000"/>
+            </a:avLst>
           </a:prstGeom>
           <a:gradFill flip="none" rotWithShape="1">
             <a:gsLst>
@@ -3608,7 +3610,9 @@
             <a:ext cx="2839724" cy="1194067"/>
           </a:xfrm>
           <a:prstGeom prst="chevron">
-            <a:avLst/>
+            <a:avLst>
+              <a:gd name="adj" fmla="val 50000"/>
+            </a:avLst>
           </a:prstGeom>
           <a:gradFill flip="none" rotWithShape="1">
             <a:gsLst>
@@ -3680,7 +3684,9 @@
             <a:ext cx="2830766" cy="1194067"/>
           </a:xfrm>
           <a:prstGeom prst="chevron">
-            <a:avLst/>
+            <a:avLst>
+              <a:gd name="adj" fmla="val 50000"/>
+            </a:avLst>
           </a:prstGeom>
           <a:gradFill flip="none" rotWithShape="1">
             <a:gsLst>
@@ -3738,7 +3744,9 @@
             <a:ext cx="2839724" cy="1194067"/>
           </a:xfrm>
           <a:prstGeom prst="chevron">
-            <a:avLst/>
+            <a:avLst>
+              <a:gd name="adj" fmla="val 50000"/>
+            </a:avLst>
           </a:prstGeom>
           <a:gradFill flip="none" rotWithShape="1">
             <a:gsLst>
@@ -3796,7 +3804,9 @@
             <a:ext cx="2454525" cy="1194067"/>
           </a:xfrm>
           <a:prstGeom prst="chevron">
-            <a:avLst/>
+            <a:avLst>
+              <a:gd name="adj" fmla="val 50000"/>
+            </a:avLst>
           </a:prstGeom>
           <a:gradFill flip="none" rotWithShape="1">
             <a:gsLst>

--- a/output/Introduction_개발일정.pptx
+++ b/output/Introduction_개발일정.pptx
@@ -3526,16 +3526,879 @@
       </p:sp>
       <p:sp>
         <p:nvSpPr>
-          <p:cNvPr id="100" name="공정 셰브런 1"/>
+          <p:cNvPr id="1001" name="메타"/>
+          <p:cNvSpPr txBox="1"/>
+          <p:nvPr/>
+        </p:nvSpPr>
+        <p:spPr>
+          <a:xfrm>
+            <a:off x="5856640" y="820000"/>
+            <a:ext cx="6000000" cy="280000"/>
+          </a:xfrm>
+          <a:prstGeom prst="rect">
+            <a:avLst/>
+          </a:prstGeom>
+          <a:noFill/>
+        </p:spPr>
+        <p:txBody>
+          <a:bodyPr wrap="square" lIns="0" tIns="0" rIns="0" bIns="0" anchor="ctr">
+            <a:noAutofit/>
+          </a:bodyPr>
+          <a:lstStyle/>
+          <a:p>
+            <a:pPr marL="0" indent="0" algn="r">
+              <a:buNone/>
+            </a:pPr>
+            <a:r>
+              <a:rPr lang="ko-KR" altLang="en-US" sz="1000" spc="-20" dirty="0">
+                <a:solidFill>
+                  <a:srgbClr val="8A94A6"/>
+                </a:solidFill>
+                <a:latin typeface="맑은 고딕"/>
+                <a:ea typeface="맑은 고딕"/>
+                <a:cs typeface="Arial"/>
+              </a:rPr>
+              <a:t>2026  시스템 개발 로드맵   |   5 Phases   |   3월 → 12월</a:t>
+            </a:r>
+          </a:p>
+        </p:txBody>
+      </p:sp>
+      <p:sp>
+        <p:nvSpPr>
+          <p:cNvPr id="1002" name="월 3월"/>
+          <p:cNvSpPr txBox="1"/>
+          <p:nvPr/>
+        </p:nvSpPr>
+        <p:spPr>
+          <a:xfrm>
+            <a:off x="2956800" y="1240000"/>
+            <a:ext cx="889984" cy="250000"/>
+          </a:xfrm>
+          <a:prstGeom prst="rect">
+            <a:avLst/>
+          </a:prstGeom>
+          <a:noFill/>
+        </p:spPr>
+        <p:txBody>
+          <a:bodyPr wrap="square" lIns="0" tIns="0" rIns="0" bIns="0" anchor="ctr">
+            <a:noAutofit/>
+          </a:bodyPr>
+          <a:lstStyle/>
+          <a:p>
+            <a:pPr marL="0" indent="0" algn="ctr">
+              <a:buNone/>
+            </a:pPr>
+            <a:r>
+              <a:rPr lang="ko-KR" altLang="en-US" sz="950" spc="-20" dirty="0">
+                <a:solidFill>
+                  <a:srgbClr val="8A94A6"/>
+                </a:solidFill>
+                <a:latin typeface="맑은 고딕"/>
+                <a:ea typeface="맑은 고딕"/>
+                <a:cs typeface="Arial"/>
+              </a:rPr>
+              <a:t>3월</a:t>
+            </a:r>
+          </a:p>
+        </p:txBody>
+      </p:sp>
+      <p:sp>
+        <p:nvSpPr>
+          <p:cNvPr id="1003" name="월 4월"/>
+          <p:cNvSpPr txBox="1"/>
+          <p:nvPr/>
+        </p:nvSpPr>
+        <p:spPr>
+          <a:xfrm>
+            <a:off x="3846784" y="1240000"/>
+            <a:ext cx="889984" cy="250000"/>
+          </a:xfrm>
+          <a:prstGeom prst="rect">
+            <a:avLst/>
+          </a:prstGeom>
+          <a:noFill/>
+        </p:spPr>
+        <p:txBody>
+          <a:bodyPr wrap="square" lIns="0" tIns="0" rIns="0" bIns="0" anchor="ctr">
+            <a:noAutofit/>
+          </a:bodyPr>
+          <a:lstStyle/>
+          <a:p>
+            <a:pPr marL="0" indent="0" algn="ctr">
+              <a:buNone/>
+            </a:pPr>
+            <a:r>
+              <a:rPr lang="ko-KR" altLang="en-US" sz="950" spc="-20" dirty="0">
+                <a:solidFill>
+                  <a:srgbClr val="8A94A6"/>
+                </a:solidFill>
+                <a:latin typeface="맑은 고딕"/>
+                <a:ea typeface="맑은 고딕"/>
+                <a:cs typeface="Arial"/>
+              </a:rPr>
+              <a:t>4월</a:t>
+            </a:r>
+          </a:p>
+        </p:txBody>
+      </p:sp>
+      <p:sp>
+        <p:nvSpPr>
+          <p:cNvPr id="1004" name="월 5월"/>
+          <p:cNvSpPr txBox="1"/>
+          <p:nvPr/>
+        </p:nvSpPr>
+        <p:spPr>
+          <a:xfrm>
+            <a:off x="4736768" y="1240000"/>
+            <a:ext cx="889984" cy="250000"/>
+          </a:xfrm>
+          <a:prstGeom prst="rect">
+            <a:avLst/>
+          </a:prstGeom>
+          <a:noFill/>
+        </p:spPr>
+        <p:txBody>
+          <a:bodyPr wrap="square" lIns="0" tIns="0" rIns="0" bIns="0" anchor="ctr">
+            <a:noAutofit/>
+          </a:bodyPr>
+          <a:lstStyle/>
+          <a:p>
+            <a:pPr marL="0" indent="0" algn="ctr">
+              <a:buNone/>
+            </a:pPr>
+            <a:r>
+              <a:rPr lang="ko-KR" altLang="en-US" sz="950" spc="-20" dirty="0">
+                <a:solidFill>
+                  <a:srgbClr val="8A94A6"/>
+                </a:solidFill>
+                <a:latin typeface="맑은 고딕"/>
+                <a:ea typeface="맑은 고딕"/>
+                <a:cs typeface="Arial"/>
+              </a:rPr>
+              <a:t>5월</a:t>
+            </a:r>
+          </a:p>
+        </p:txBody>
+      </p:sp>
+      <p:sp>
+        <p:nvSpPr>
+          <p:cNvPr id="1005" name="월 6월"/>
+          <p:cNvSpPr txBox="1"/>
+          <p:nvPr/>
+        </p:nvSpPr>
+        <p:spPr>
+          <a:xfrm>
+            <a:off x="5626752" y="1240000"/>
+            <a:ext cx="889984" cy="250000"/>
+          </a:xfrm>
+          <a:prstGeom prst="rect">
+            <a:avLst/>
+          </a:prstGeom>
+          <a:noFill/>
+        </p:spPr>
+        <p:txBody>
+          <a:bodyPr wrap="square" lIns="0" tIns="0" rIns="0" bIns="0" anchor="ctr">
+            <a:noAutofit/>
+          </a:bodyPr>
+          <a:lstStyle/>
+          <a:p>
+            <a:pPr marL="0" indent="0" algn="ctr">
+              <a:buNone/>
+            </a:pPr>
+            <a:r>
+              <a:rPr lang="ko-KR" altLang="en-US" sz="950" spc="-20" dirty="0">
+                <a:solidFill>
+                  <a:srgbClr val="8A94A6"/>
+                </a:solidFill>
+                <a:latin typeface="맑은 고딕"/>
+                <a:ea typeface="맑은 고딕"/>
+                <a:cs typeface="Arial"/>
+              </a:rPr>
+              <a:t>6월</a:t>
+            </a:r>
+          </a:p>
+        </p:txBody>
+      </p:sp>
+      <p:sp>
+        <p:nvSpPr>
+          <p:cNvPr id="1006" name="월 7월"/>
+          <p:cNvSpPr txBox="1"/>
+          <p:nvPr/>
+        </p:nvSpPr>
+        <p:spPr>
+          <a:xfrm>
+            <a:off x="6516736" y="1240000"/>
+            <a:ext cx="889984" cy="250000"/>
+          </a:xfrm>
+          <a:prstGeom prst="rect">
+            <a:avLst/>
+          </a:prstGeom>
+          <a:noFill/>
+        </p:spPr>
+        <p:txBody>
+          <a:bodyPr wrap="square" lIns="0" tIns="0" rIns="0" bIns="0" anchor="ctr">
+            <a:noAutofit/>
+          </a:bodyPr>
+          <a:lstStyle/>
+          <a:p>
+            <a:pPr marL="0" indent="0" algn="ctr">
+              <a:buNone/>
+            </a:pPr>
+            <a:r>
+              <a:rPr lang="ko-KR" altLang="en-US" sz="950" spc="-20" dirty="0">
+                <a:solidFill>
+                  <a:srgbClr val="8A94A6"/>
+                </a:solidFill>
+                <a:latin typeface="맑은 고딕"/>
+                <a:ea typeface="맑은 고딕"/>
+                <a:cs typeface="Arial"/>
+              </a:rPr>
+              <a:t>7월</a:t>
+            </a:r>
+          </a:p>
+        </p:txBody>
+      </p:sp>
+      <p:sp>
+        <p:nvSpPr>
+          <p:cNvPr id="1007" name="월 8월"/>
+          <p:cNvSpPr txBox="1"/>
+          <p:nvPr/>
+        </p:nvSpPr>
+        <p:spPr>
+          <a:xfrm>
+            <a:off x="7406720" y="1240000"/>
+            <a:ext cx="889984" cy="250000"/>
+          </a:xfrm>
+          <a:prstGeom prst="rect">
+            <a:avLst/>
+          </a:prstGeom>
+          <a:noFill/>
+        </p:spPr>
+        <p:txBody>
+          <a:bodyPr wrap="square" lIns="0" tIns="0" rIns="0" bIns="0" anchor="ctr">
+            <a:noAutofit/>
+          </a:bodyPr>
+          <a:lstStyle/>
+          <a:p>
+            <a:pPr marL="0" indent="0" algn="ctr">
+              <a:buNone/>
+            </a:pPr>
+            <a:r>
+              <a:rPr lang="ko-KR" altLang="en-US" sz="950" spc="-20" dirty="0">
+                <a:solidFill>
+                  <a:srgbClr val="8A94A6"/>
+                </a:solidFill>
+                <a:latin typeface="맑은 고딕"/>
+                <a:ea typeface="맑은 고딕"/>
+                <a:cs typeface="Arial"/>
+              </a:rPr>
+              <a:t>8월</a:t>
+            </a:r>
+          </a:p>
+        </p:txBody>
+      </p:sp>
+      <p:sp>
+        <p:nvSpPr>
+          <p:cNvPr id="1008" name="월 9월"/>
+          <p:cNvSpPr txBox="1"/>
+          <p:nvPr/>
+        </p:nvSpPr>
+        <p:spPr>
+          <a:xfrm>
+            <a:off x="8296704" y="1240000"/>
+            <a:ext cx="889984" cy="250000"/>
+          </a:xfrm>
+          <a:prstGeom prst="rect">
+            <a:avLst/>
+          </a:prstGeom>
+          <a:noFill/>
+        </p:spPr>
+        <p:txBody>
+          <a:bodyPr wrap="square" lIns="0" tIns="0" rIns="0" bIns="0" anchor="ctr">
+            <a:noAutofit/>
+          </a:bodyPr>
+          <a:lstStyle/>
+          <a:p>
+            <a:pPr marL="0" indent="0" algn="ctr">
+              <a:buNone/>
+            </a:pPr>
+            <a:r>
+              <a:rPr lang="ko-KR" altLang="en-US" sz="950" spc="-20" dirty="0">
+                <a:solidFill>
+                  <a:srgbClr val="8A94A6"/>
+                </a:solidFill>
+                <a:latin typeface="맑은 고딕"/>
+                <a:ea typeface="맑은 고딕"/>
+                <a:cs typeface="Arial"/>
+              </a:rPr>
+              <a:t>9월</a:t>
+            </a:r>
+          </a:p>
+        </p:txBody>
+      </p:sp>
+      <p:sp>
+        <p:nvSpPr>
+          <p:cNvPr id="1009" name="월 10월"/>
+          <p:cNvSpPr txBox="1"/>
+          <p:nvPr/>
+        </p:nvSpPr>
+        <p:spPr>
+          <a:xfrm>
+            <a:off x="9186688" y="1240000"/>
+            <a:ext cx="889984" cy="250000"/>
+          </a:xfrm>
+          <a:prstGeom prst="rect">
+            <a:avLst/>
+          </a:prstGeom>
+          <a:noFill/>
+        </p:spPr>
+        <p:txBody>
+          <a:bodyPr wrap="square" lIns="0" tIns="0" rIns="0" bIns="0" anchor="ctr">
+            <a:noAutofit/>
+          </a:bodyPr>
+          <a:lstStyle/>
+          <a:p>
+            <a:pPr marL="0" indent="0" algn="ctr">
+              <a:buNone/>
+            </a:pPr>
+            <a:r>
+              <a:rPr lang="ko-KR" altLang="en-US" sz="950" spc="-20" dirty="0">
+                <a:solidFill>
+                  <a:srgbClr val="8A94A6"/>
+                </a:solidFill>
+                <a:latin typeface="맑은 고딕"/>
+                <a:ea typeface="맑은 고딕"/>
+                <a:cs typeface="Arial"/>
+              </a:rPr>
+              <a:t>10월</a:t>
+            </a:r>
+          </a:p>
+        </p:txBody>
+      </p:sp>
+      <p:sp>
+        <p:nvSpPr>
+          <p:cNvPr id="1010" name="월 11월"/>
+          <p:cNvSpPr txBox="1"/>
+          <p:nvPr/>
+        </p:nvSpPr>
+        <p:spPr>
+          <a:xfrm>
+            <a:off x="10076672" y="1240000"/>
+            <a:ext cx="889984" cy="250000"/>
+          </a:xfrm>
+          <a:prstGeom prst="rect">
+            <a:avLst/>
+          </a:prstGeom>
+          <a:noFill/>
+        </p:spPr>
+        <p:txBody>
+          <a:bodyPr wrap="square" lIns="0" tIns="0" rIns="0" bIns="0" anchor="ctr">
+            <a:noAutofit/>
+          </a:bodyPr>
+          <a:lstStyle/>
+          <a:p>
+            <a:pPr marL="0" indent="0" algn="ctr">
+              <a:buNone/>
+            </a:pPr>
+            <a:r>
+              <a:rPr lang="ko-KR" altLang="en-US" sz="950" spc="-20" dirty="0">
+                <a:solidFill>
+                  <a:srgbClr val="8A94A6"/>
+                </a:solidFill>
+                <a:latin typeface="맑은 고딕"/>
+                <a:ea typeface="맑은 고딕"/>
+                <a:cs typeface="Arial"/>
+              </a:rPr>
+              <a:t>11월</a:t>
+            </a:r>
+          </a:p>
+        </p:txBody>
+      </p:sp>
+      <p:sp>
+        <p:nvSpPr>
+          <p:cNvPr id="1011" name="월 12월"/>
+          <p:cNvSpPr txBox="1"/>
+          <p:nvPr/>
+        </p:nvSpPr>
+        <p:spPr>
+          <a:xfrm>
+            <a:off x="10966656" y="1240000"/>
+            <a:ext cx="889984" cy="250000"/>
+          </a:xfrm>
+          <a:prstGeom prst="rect">
+            <a:avLst/>
+          </a:prstGeom>
+          <a:noFill/>
+        </p:spPr>
+        <p:txBody>
+          <a:bodyPr wrap="square" lIns="0" tIns="0" rIns="0" bIns="0" anchor="ctr">
+            <a:noAutofit/>
+          </a:bodyPr>
+          <a:lstStyle/>
+          <a:p>
+            <a:pPr marL="0" indent="0" algn="ctr">
+              <a:buNone/>
+            </a:pPr>
+            <a:r>
+              <a:rPr lang="ko-KR" altLang="en-US" sz="950" spc="-20" dirty="0">
+                <a:solidFill>
+                  <a:srgbClr val="8A94A6"/>
+                </a:solidFill>
+                <a:latin typeface="맑은 고딕"/>
+                <a:ea typeface="맑은 고딕"/>
+                <a:cs typeface="Arial"/>
+              </a:rPr>
+              <a:t>12월</a:t>
+            </a:r>
+          </a:p>
+        </p:txBody>
+      </p:sp>
+      <p:sp>
+        <p:nvSpPr>
+          <p:cNvPr id="1012" name="축 구분선"/>
           <p:cNvSpPr/>
           <p:nvPr/>
         </p:nvSpPr>
         <p:spPr>
           <a:xfrm>
-            <a:off x="895812" y="1135490"/>
-            <a:ext cx="1800582" cy="1194067"/>
-          </a:xfrm>
-          <a:prstGeom prst="homePlate">
+            <a:off x="426800" y="1510000"/>
+            <a:ext cx="11429840" cy="9525"/>
+          </a:xfrm>
+          <a:prstGeom prst="rect">
+            <a:avLst/>
+          </a:prstGeom>
+          <a:solidFill>
+            <a:srgbClr val="E3E9F0"/>
+          </a:solidFill>
+          <a:ln>
+            <a:noFill/>
+          </a:ln>
+        </p:spPr>
+        <p:txBody>
+          <a:bodyPr wrap="none" anchor="ctr"/>
+          <a:lstStyle/>
+          <a:p>
+            <a:pPr algn="ctr">
+              <a:buNone/>
+            </a:pPr>
+            <a:endParaRPr lang="ko-KR"/>
+          </a:p>
+        </p:txBody>
+      </p:sp>
+      <p:sp>
+        <p:nvSpPr>
+          <p:cNvPr id="1013" name="격자 0"/>
+          <p:cNvSpPr/>
+          <p:nvPr/>
+        </p:nvSpPr>
+        <p:spPr>
+          <a:xfrm>
+            <a:off x="2956800" y="1510000"/>
+            <a:ext cx="9525" cy="1860000"/>
+          </a:xfrm>
+          <a:prstGeom prst="rect">
+            <a:avLst/>
+          </a:prstGeom>
+          <a:solidFill>
+            <a:srgbClr val="EFF2F7"/>
+          </a:solidFill>
+          <a:ln>
+            <a:noFill/>
+          </a:ln>
+        </p:spPr>
+        <p:txBody>
+          <a:bodyPr wrap="none" anchor="ctr"/>
+          <a:lstStyle/>
+          <a:p>
+            <a:pPr algn="ctr">
+              <a:buNone/>
+            </a:pPr>
+            <a:endParaRPr lang="ko-KR"/>
+          </a:p>
+        </p:txBody>
+      </p:sp>
+      <p:sp>
+        <p:nvSpPr>
+          <p:cNvPr id="1014" name="격자 1"/>
+          <p:cNvSpPr/>
+          <p:nvPr/>
+        </p:nvSpPr>
+        <p:spPr>
+          <a:xfrm>
+            <a:off x="3846784" y="1510000"/>
+            <a:ext cx="9525" cy="1860000"/>
+          </a:xfrm>
+          <a:prstGeom prst="rect">
+            <a:avLst/>
+          </a:prstGeom>
+          <a:solidFill>
+            <a:srgbClr val="EFF2F7"/>
+          </a:solidFill>
+          <a:ln>
+            <a:noFill/>
+          </a:ln>
+        </p:spPr>
+        <p:txBody>
+          <a:bodyPr wrap="none" anchor="ctr"/>
+          <a:lstStyle/>
+          <a:p>
+            <a:pPr algn="ctr">
+              <a:buNone/>
+            </a:pPr>
+            <a:endParaRPr lang="ko-KR"/>
+          </a:p>
+        </p:txBody>
+      </p:sp>
+      <p:sp>
+        <p:nvSpPr>
+          <p:cNvPr id="1015" name="격자 2"/>
+          <p:cNvSpPr/>
+          <p:nvPr/>
+        </p:nvSpPr>
+        <p:spPr>
+          <a:xfrm>
+            <a:off x="4736768" y="1510000"/>
+            <a:ext cx="9525" cy="1860000"/>
+          </a:xfrm>
+          <a:prstGeom prst="rect">
+            <a:avLst/>
+          </a:prstGeom>
+          <a:solidFill>
+            <a:srgbClr val="EFF2F7"/>
+          </a:solidFill>
+          <a:ln>
+            <a:noFill/>
+          </a:ln>
+        </p:spPr>
+        <p:txBody>
+          <a:bodyPr wrap="none" anchor="ctr"/>
+          <a:lstStyle/>
+          <a:p>
+            <a:pPr algn="ctr">
+              <a:buNone/>
+            </a:pPr>
+            <a:endParaRPr lang="ko-KR"/>
+          </a:p>
+        </p:txBody>
+      </p:sp>
+      <p:sp>
+        <p:nvSpPr>
+          <p:cNvPr id="1016" name="격자 3"/>
+          <p:cNvSpPr/>
+          <p:nvPr/>
+        </p:nvSpPr>
+        <p:spPr>
+          <a:xfrm>
+            <a:off x="5626752" y="1510000"/>
+            <a:ext cx="9525" cy="1860000"/>
+          </a:xfrm>
+          <a:prstGeom prst="rect">
+            <a:avLst/>
+          </a:prstGeom>
+          <a:solidFill>
+            <a:srgbClr val="EFF2F7"/>
+          </a:solidFill>
+          <a:ln>
+            <a:noFill/>
+          </a:ln>
+        </p:spPr>
+        <p:txBody>
+          <a:bodyPr wrap="none" anchor="ctr"/>
+          <a:lstStyle/>
+          <a:p>
+            <a:pPr algn="ctr">
+              <a:buNone/>
+            </a:pPr>
+            <a:endParaRPr lang="ko-KR"/>
+          </a:p>
+        </p:txBody>
+      </p:sp>
+      <p:sp>
+        <p:nvSpPr>
+          <p:cNvPr id="1017" name="격자 4"/>
+          <p:cNvSpPr/>
+          <p:nvPr/>
+        </p:nvSpPr>
+        <p:spPr>
+          <a:xfrm>
+            <a:off x="6516736" y="1510000"/>
+            <a:ext cx="9525" cy="1860000"/>
+          </a:xfrm>
+          <a:prstGeom prst="rect">
+            <a:avLst/>
+          </a:prstGeom>
+          <a:solidFill>
+            <a:srgbClr val="EFF2F7"/>
+          </a:solidFill>
+          <a:ln>
+            <a:noFill/>
+          </a:ln>
+        </p:spPr>
+        <p:txBody>
+          <a:bodyPr wrap="none" anchor="ctr"/>
+          <a:lstStyle/>
+          <a:p>
+            <a:pPr algn="ctr">
+              <a:buNone/>
+            </a:pPr>
+            <a:endParaRPr lang="ko-KR"/>
+          </a:p>
+        </p:txBody>
+      </p:sp>
+      <p:sp>
+        <p:nvSpPr>
+          <p:cNvPr id="1018" name="격자 5"/>
+          <p:cNvSpPr/>
+          <p:nvPr/>
+        </p:nvSpPr>
+        <p:spPr>
+          <a:xfrm>
+            <a:off x="7406720" y="1510000"/>
+            <a:ext cx="9525" cy="1860000"/>
+          </a:xfrm>
+          <a:prstGeom prst="rect">
+            <a:avLst/>
+          </a:prstGeom>
+          <a:solidFill>
+            <a:srgbClr val="EFF2F7"/>
+          </a:solidFill>
+          <a:ln>
+            <a:noFill/>
+          </a:ln>
+        </p:spPr>
+        <p:txBody>
+          <a:bodyPr wrap="none" anchor="ctr"/>
+          <a:lstStyle/>
+          <a:p>
+            <a:pPr algn="ctr">
+              <a:buNone/>
+            </a:pPr>
+            <a:endParaRPr lang="ko-KR"/>
+          </a:p>
+        </p:txBody>
+      </p:sp>
+      <p:sp>
+        <p:nvSpPr>
+          <p:cNvPr id="1019" name="격자 6"/>
+          <p:cNvSpPr/>
+          <p:nvPr/>
+        </p:nvSpPr>
+        <p:spPr>
+          <a:xfrm>
+            <a:off x="8296704" y="1510000"/>
+            <a:ext cx="9525" cy="1860000"/>
+          </a:xfrm>
+          <a:prstGeom prst="rect">
+            <a:avLst/>
+          </a:prstGeom>
+          <a:solidFill>
+            <a:srgbClr val="EFF2F7"/>
+          </a:solidFill>
+          <a:ln>
+            <a:noFill/>
+          </a:ln>
+        </p:spPr>
+        <p:txBody>
+          <a:bodyPr wrap="none" anchor="ctr"/>
+          <a:lstStyle/>
+          <a:p>
+            <a:pPr algn="ctr">
+              <a:buNone/>
+            </a:pPr>
+            <a:endParaRPr lang="ko-KR"/>
+          </a:p>
+        </p:txBody>
+      </p:sp>
+      <p:sp>
+        <p:nvSpPr>
+          <p:cNvPr id="1020" name="격자 7"/>
+          <p:cNvSpPr/>
+          <p:nvPr/>
+        </p:nvSpPr>
+        <p:spPr>
+          <a:xfrm>
+            <a:off x="9186688" y="1510000"/>
+            <a:ext cx="9525" cy="1860000"/>
+          </a:xfrm>
+          <a:prstGeom prst="rect">
+            <a:avLst/>
+          </a:prstGeom>
+          <a:solidFill>
+            <a:srgbClr val="EFF2F7"/>
+          </a:solidFill>
+          <a:ln>
+            <a:noFill/>
+          </a:ln>
+        </p:spPr>
+        <p:txBody>
+          <a:bodyPr wrap="none" anchor="ctr"/>
+          <a:lstStyle/>
+          <a:p>
+            <a:pPr algn="ctr">
+              <a:buNone/>
+            </a:pPr>
+            <a:endParaRPr lang="ko-KR"/>
+          </a:p>
+        </p:txBody>
+      </p:sp>
+      <p:sp>
+        <p:nvSpPr>
+          <p:cNvPr id="1021" name="격자 8"/>
+          <p:cNvSpPr/>
+          <p:nvPr/>
+        </p:nvSpPr>
+        <p:spPr>
+          <a:xfrm>
+            <a:off x="10076672" y="1510000"/>
+            <a:ext cx="9525" cy="1860000"/>
+          </a:xfrm>
+          <a:prstGeom prst="rect">
+            <a:avLst/>
+          </a:prstGeom>
+          <a:solidFill>
+            <a:srgbClr val="EFF2F7"/>
+          </a:solidFill>
+          <a:ln>
+            <a:noFill/>
+          </a:ln>
+        </p:spPr>
+        <p:txBody>
+          <a:bodyPr wrap="none" anchor="ctr"/>
+          <a:lstStyle/>
+          <a:p>
+            <a:pPr algn="ctr">
+              <a:buNone/>
+            </a:pPr>
+            <a:endParaRPr lang="ko-KR"/>
+          </a:p>
+        </p:txBody>
+      </p:sp>
+      <p:sp>
+        <p:nvSpPr>
+          <p:cNvPr id="1022" name="격자 9"/>
+          <p:cNvSpPr/>
+          <p:nvPr/>
+        </p:nvSpPr>
+        <p:spPr>
+          <a:xfrm>
+            <a:off x="10966656" y="1510000"/>
+            <a:ext cx="9525" cy="1860000"/>
+          </a:xfrm>
+          <a:prstGeom prst="rect">
+            <a:avLst/>
+          </a:prstGeom>
+          <a:solidFill>
+            <a:srgbClr val="EFF2F7"/>
+          </a:solidFill>
+          <a:ln>
+            <a:noFill/>
+          </a:ln>
+        </p:spPr>
+        <p:txBody>
+          <a:bodyPr wrap="none" anchor="ctr"/>
+          <a:lstStyle/>
+          <a:p>
+            <a:pPr algn="ctr">
+              <a:buNone/>
+            </a:pPr>
+            <a:endParaRPr lang="ko-KR"/>
+          </a:p>
+        </p:txBody>
+      </p:sp>
+      <p:sp>
+        <p:nvSpPr>
+          <p:cNvPr id="1023" name="격자 10"/>
+          <p:cNvSpPr/>
+          <p:nvPr/>
+        </p:nvSpPr>
+        <p:spPr>
+          <a:xfrm>
+            <a:off x="11856640" y="1510000"/>
+            <a:ext cx="9525" cy="1860000"/>
+          </a:xfrm>
+          <a:prstGeom prst="rect">
+            <a:avLst/>
+          </a:prstGeom>
+          <a:solidFill>
+            <a:srgbClr val="EFF2F7"/>
+          </a:solidFill>
+          <a:ln>
+            <a:noFill/>
+          </a:ln>
+        </p:spPr>
+        <p:txBody>
+          <a:bodyPr wrap="none" anchor="ctr"/>
+          <a:lstStyle/>
+          <a:p>
+            <a:pPr algn="ctr">
+              <a:buNone/>
+            </a:pPr>
+            <a:endParaRPr lang="ko-KR"/>
+          </a:p>
+        </p:txBody>
+      </p:sp>
+      <p:sp>
+        <p:nvSpPr>
+          <p:cNvPr id="1024" name="간트라벨 01"/>
+          <p:cNvSpPr txBox="1"/>
+          <p:nvPr/>
+        </p:nvSpPr>
+        <p:spPr>
+          <a:xfrm>
+            <a:off x="426800" y="1570000"/>
+            <a:ext cx="2350000" cy="360000"/>
+          </a:xfrm>
+          <a:prstGeom prst="rect">
+            <a:avLst/>
+          </a:prstGeom>
+          <a:noFill/>
+        </p:spPr>
+        <p:txBody>
+          <a:bodyPr wrap="square" lIns="0" tIns="0" rIns="0" bIns="0" anchor="ctr">
+            <a:noAutofit/>
+          </a:bodyPr>
+          <a:lstStyle/>
+          <a:p>
+            <a:pPr marL="0" indent="0" algn="l">
+              <a:buNone/>
+            </a:pPr>
+            <a:r>
+              <a:rPr lang="ko-KR" altLang="en-US" sz="1050" b="1" spc="-20" dirty="0">
+                <a:solidFill>
+                  <a:srgbClr val="7A5AA8"/>
+                </a:solidFill>
+                <a:latin typeface="맑은 고딕"/>
+                <a:ea typeface="맑은 고딕"/>
+                <a:cs typeface="Arial"/>
+              </a:rPr>
+              <a:t>01   </a:t>
+            </a:r>
+            <a:r>
+              <a:rPr lang="ko-KR" altLang="en-US" sz="1050" spc="-20" dirty="0">
+                <a:solidFill>
+                  <a:srgbClr val="44536A"/>
+                </a:solidFill>
+                <a:latin typeface="맑은 고딕"/>
+                <a:ea typeface="맑은 고딕"/>
+                <a:cs typeface="Arial"/>
+              </a:rPr>
+              <a:t>KOM &amp; 방향성 검토</a:t>
+            </a:r>
+          </a:p>
+        </p:txBody>
+      </p:sp>
+      <p:sp>
+        <p:nvSpPr>
+          <p:cNvPr id="1025" name="기간바 01"/>
+          <p:cNvSpPr/>
+          <p:nvPr/>
+        </p:nvSpPr>
+        <p:spPr>
+          <a:xfrm>
+            <a:off x="2956800" y="1657500"/>
+            <a:ext cx="489491" cy="185000"/>
+          </a:xfrm>
+          <a:prstGeom prst="roundRect">
             <a:avLst>
               <a:gd name="adj" fmla="val 50000"/>
             </a:avLst>
@@ -3543,339 +4406,2389 @@
           <a:gradFill flip="none" rotWithShape="1">
             <a:gsLst>
               <a:gs pos="0">
-                <a:srgbClr val="7D58AA"/>
-              </a:gs>
-              <a:gs pos="12000">
-                <a:srgbClr val="825AB0"/>
+                <a:srgbClr val="7A5AA8"/>
               </a:gs>
               <a:gs pos="100000">
-                <a:srgbClr val="583D78"/>
+                <a:srgbClr val="5B4185"/>
               </a:gs>
             </a:gsLst>
-            <a:lin ang="5400000" scaled="0"/>
+            <a:lin ang="0" scaled="0"/>
+          </a:gradFill>
+          <a:ln>
+            <a:noFill/>
+          </a:ln>
+        </p:spPr>
+        <p:txBody>
+          <a:bodyPr wrap="none" anchor="ctr"/>
+          <a:lstStyle/>
+          <a:p>
+            <a:pPr algn="ctr">
+              <a:buNone/>
+            </a:pPr>
+            <a:endParaRPr lang="ko-KR"/>
+          </a:p>
+        </p:txBody>
+      </p:sp>
+      <p:sp>
+        <p:nvSpPr>
+          <p:cNvPr id="1026" name="행배경 1"/>
+          <p:cNvSpPr/>
+          <p:nvPr/>
+        </p:nvSpPr>
+        <p:spPr>
+          <a:xfrm>
+            <a:off x="426800" y="1930000"/>
+            <a:ext cx="11429840" cy="360000"/>
+          </a:xfrm>
+          <a:prstGeom prst="rect">
+            <a:avLst/>
+          </a:prstGeom>
+          <a:solidFill>
+            <a:srgbClr val="FBFCFE"/>
+          </a:solidFill>
+          <a:ln>
+            <a:noFill/>
+          </a:ln>
+        </p:spPr>
+        <p:txBody>
+          <a:bodyPr wrap="none" anchor="ctr"/>
+          <a:lstStyle/>
+          <a:p>
+            <a:pPr algn="ctr">
+              <a:buNone/>
+            </a:pPr>
+            <a:endParaRPr lang="ko-KR"/>
+          </a:p>
+        </p:txBody>
+      </p:sp>
+      <p:sp>
+        <p:nvSpPr>
+          <p:cNvPr id="1027" name="간트라벨 02"/>
+          <p:cNvSpPr txBox="1"/>
+          <p:nvPr/>
+        </p:nvSpPr>
+        <p:spPr>
+          <a:xfrm>
+            <a:off x="426800" y="1930000"/>
+            <a:ext cx="2350000" cy="360000"/>
+          </a:xfrm>
+          <a:prstGeom prst="rect">
+            <a:avLst/>
+          </a:prstGeom>
+          <a:noFill/>
+        </p:spPr>
+        <p:txBody>
+          <a:bodyPr wrap="square" lIns="0" tIns="0" rIns="0" bIns="0" anchor="ctr">
+            <a:noAutofit/>
+          </a:bodyPr>
+          <a:lstStyle/>
+          <a:p>
+            <a:pPr marL="0" indent="0" algn="l">
+              <a:buNone/>
+            </a:pPr>
+            <a:r>
+              <a:rPr lang="ko-KR" altLang="en-US" sz="1050" b="1" spc="-20" dirty="0">
+                <a:solidFill>
+                  <a:srgbClr val="5B54B8"/>
+                </a:solidFill>
+                <a:latin typeface="맑은 고딕"/>
+                <a:ea typeface="맑은 고딕"/>
+                <a:cs typeface="Arial"/>
+              </a:rPr>
+              <a:t>02   </a:t>
+            </a:r>
+            <a:r>
+              <a:rPr lang="ko-KR" altLang="en-US" sz="1050" spc="-20" dirty="0">
+                <a:solidFill>
+                  <a:srgbClr val="44536A"/>
+                </a:solidFill>
+                <a:latin typeface="맑은 고딕"/>
+                <a:ea typeface="맑은 고딕"/>
+                <a:cs typeface="Arial"/>
+              </a:rPr>
+              <a:t>L&amp;L System Mgmt</a:t>
+            </a:r>
+          </a:p>
+        </p:txBody>
+      </p:sp>
+      <p:sp>
+        <p:nvSpPr>
+          <p:cNvPr id="1028" name="기간바 02"/>
+          <p:cNvSpPr/>
+          <p:nvPr/>
+        </p:nvSpPr>
+        <p:spPr>
+          <a:xfrm>
+            <a:off x="3446291" y="2017500"/>
+            <a:ext cx="845484" cy="185000"/>
+          </a:xfrm>
+          <a:prstGeom prst="roundRect">
+            <a:avLst>
+              <a:gd name="adj" fmla="val 50000"/>
+            </a:avLst>
+          </a:prstGeom>
+          <a:gradFill flip="none" rotWithShape="1">
+            <a:gsLst>
+              <a:gs pos="0">
+                <a:srgbClr val="5B54B8"/>
+              </a:gs>
+              <a:gs pos="100000">
+                <a:srgbClr val="423C90"/>
+              </a:gs>
+            </a:gsLst>
+            <a:lin ang="0" scaled="0"/>
+          </a:gradFill>
+          <a:ln>
+            <a:noFill/>
+          </a:ln>
+        </p:spPr>
+        <p:txBody>
+          <a:bodyPr wrap="none" anchor="ctr"/>
+          <a:lstStyle/>
+          <a:p>
+            <a:pPr algn="ctr">
+              <a:buNone/>
+            </a:pPr>
+            <a:endParaRPr lang="ko-KR"/>
+          </a:p>
+        </p:txBody>
+      </p:sp>
+      <p:sp>
+        <p:nvSpPr>
+          <p:cNvPr id="1029" name="간트라벨 03"/>
+          <p:cNvSpPr txBox="1"/>
+          <p:nvPr/>
+        </p:nvSpPr>
+        <p:spPr>
+          <a:xfrm>
+            <a:off x="426800" y="2290000"/>
+            <a:ext cx="2350000" cy="360000"/>
+          </a:xfrm>
+          <a:prstGeom prst="rect">
+            <a:avLst/>
+          </a:prstGeom>
+          <a:noFill/>
+        </p:spPr>
+        <p:txBody>
+          <a:bodyPr wrap="square" lIns="0" tIns="0" rIns="0" bIns="0" anchor="ctr">
+            <a:noAutofit/>
+          </a:bodyPr>
+          <a:lstStyle/>
+          <a:p>
+            <a:pPr marL="0" indent="0" algn="l">
+              <a:buNone/>
+            </a:pPr>
+            <a:r>
+              <a:rPr lang="ko-KR" altLang="en-US" sz="1050" b="1" spc="-20" dirty="0">
+                <a:solidFill>
+                  <a:srgbClr val="4A63C4"/>
+                </a:solidFill>
+                <a:latin typeface="맑은 고딕"/>
+                <a:ea typeface="맑은 고딕"/>
+                <a:cs typeface="Arial"/>
+              </a:rPr>
+              <a:t>03   </a:t>
+            </a:r>
+            <a:r>
+              <a:rPr lang="ko-KR" altLang="en-US" sz="1050" spc="-20" dirty="0">
+                <a:solidFill>
+                  <a:srgbClr val="44536A"/>
+                </a:solidFill>
+                <a:latin typeface="맑은 고딕"/>
+                <a:ea typeface="맑은 고딕"/>
+                <a:cs typeface="Arial"/>
+              </a:rPr>
+              <a:t>Trend Mgmt</a:t>
+            </a:r>
+          </a:p>
+        </p:txBody>
+      </p:sp>
+      <p:sp>
+        <p:nvSpPr>
+          <p:cNvPr id="1030" name="기간바 03"/>
+          <p:cNvSpPr/>
+          <p:nvPr/>
+        </p:nvSpPr>
+        <p:spPr>
+          <a:xfrm>
+            <a:off x="4291776" y="2377500"/>
+            <a:ext cx="889984" cy="185000"/>
+          </a:xfrm>
+          <a:prstGeom prst="roundRect">
+            <a:avLst>
+              <a:gd name="adj" fmla="val 50000"/>
+            </a:avLst>
+          </a:prstGeom>
+          <a:gradFill flip="none" rotWithShape="1">
+            <a:gsLst>
+              <a:gs pos="0">
+                <a:srgbClr val="4A63C4"/>
+              </a:gs>
+              <a:gs pos="100000">
+                <a:srgbClr val="35499C"/>
+              </a:gs>
+            </a:gsLst>
+            <a:lin ang="0" scaled="0"/>
+          </a:gradFill>
+          <a:ln>
+            <a:noFill/>
+          </a:ln>
+        </p:spPr>
+        <p:txBody>
+          <a:bodyPr wrap="none" anchor="ctr"/>
+          <a:lstStyle/>
+          <a:p>
+            <a:pPr algn="ctr">
+              <a:buNone/>
+            </a:pPr>
+            <a:endParaRPr lang="ko-KR"/>
+          </a:p>
+        </p:txBody>
+      </p:sp>
+      <p:sp>
+        <p:nvSpPr>
+          <p:cNvPr id="1031" name="행배경 3"/>
+          <p:cNvSpPr/>
+          <p:nvPr/>
+        </p:nvSpPr>
+        <p:spPr>
+          <a:xfrm>
+            <a:off x="426800" y="2650000"/>
+            <a:ext cx="11429840" cy="360000"/>
+          </a:xfrm>
+          <a:prstGeom prst="rect">
+            <a:avLst/>
+          </a:prstGeom>
+          <a:solidFill>
+            <a:srgbClr val="FBFCFE"/>
+          </a:solidFill>
+          <a:ln>
+            <a:noFill/>
+          </a:ln>
+        </p:spPr>
+        <p:txBody>
+          <a:bodyPr wrap="none" anchor="ctr"/>
+          <a:lstStyle/>
+          <a:p>
+            <a:pPr algn="ctr">
+              <a:buNone/>
+            </a:pPr>
+            <a:endParaRPr lang="ko-KR"/>
+          </a:p>
+        </p:txBody>
+      </p:sp>
+      <p:sp>
+        <p:nvSpPr>
+          <p:cNvPr id="1032" name="간트라벨 04"/>
+          <p:cNvSpPr txBox="1"/>
+          <p:nvPr/>
+        </p:nvSpPr>
+        <p:spPr>
+          <a:xfrm>
+            <a:off x="426800" y="2650000"/>
+            <a:ext cx="2350000" cy="360000"/>
+          </a:xfrm>
+          <a:prstGeom prst="rect">
+            <a:avLst/>
+          </a:prstGeom>
+          <a:noFill/>
+        </p:spPr>
+        <p:txBody>
+          <a:bodyPr wrap="square" lIns="0" tIns="0" rIns="0" bIns="0" anchor="ctr">
+            <a:noAutofit/>
+          </a:bodyPr>
+          <a:lstStyle/>
+          <a:p>
+            <a:pPr marL="0" indent="0" algn="l">
+              <a:buNone/>
+            </a:pPr>
+            <a:r>
+              <a:rPr lang="ko-KR" altLang="en-US" sz="1050" b="1" spc="-20" dirty="0">
+                <a:solidFill>
+                  <a:srgbClr val="3F87D0"/>
+                </a:solidFill>
+                <a:latin typeface="맑은 고딕"/>
+                <a:ea typeface="맑은 고딕"/>
+                <a:cs typeface="Arial"/>
+              </a:rPr>
+              <a:t>04   </a:t>
+            </a:r>
+            <a:r>
+              <a:rPr lang="ko-KR" altLang="en-US" sz="1050" spc="-20" dirty="0">
+                <a:solidFill>
+                  <a:srgbClr val="44536A"/>
+                </a:solidFill>
+                <a:latin typeface="맑은 고딕"/>
+                <a:ea typeface="맑은 고딕"/>
+                <a:cs typeface="Arial"/>
+              </a:rPr>
+              <a:t>Risk Mgmt</a:t>
+            </a:r>
+          </a:p>
+        </p:txBody>
+      </p:sp>
+      <p:sp>
+        <p:nvSpPr>
+          <p:cNvPr id="1033" name="기간바 04"/>
+          <p:cNvSpPr/>
+          <p:nvPr/>
+        </p:nvSpPr>
+        <p:spPr>
+          <a:xfrm>
+            <a:off x="5181760" y="2737500"/>
+            <a:ext cx="1334976" cy="185000"/>
+          </a:xfrm>
+          <a:prstGeom prst="roundRect">
+            <a:avLst>
+              <a:gd name="adj" fmla="val 50000"/>
+            </a:avLst>
+          </a:prstGeom>
+          <a:gradFill flip="none" rotWithShape="1">
+            <a:gsLst>
+              <a:gs pos="0">
+                <a:srgbClr val="3F87D0"/>
+              </a:gs>
+              <a:gs pos="100000">
+                <a:srgbClr val="2C64A4"/>
+              </a:gs>
+            </a:gsLst>
+            <a:lin ang="0" scaled="0"/>
+          </a:gradFill>
+          <a:ln>
+            <a:noFill/>
+          </a:ln>
+        </p:spPr>
+        <p:txBody>
+          <a:bodyPr wrap="none" anchor="ctr"/>
+          <a:lstStyle/>
+          <a:p>
+            <a:pPr algn="ctr">
+              <a:buNone/>
+            </a:pPr>
+            <a:endParaRPr lang="ko-KR"/>
+          </a:p>
+        </p:txBody>
+      </p:sp>
+      <p:sp>
+        <p:nvSpPr>
+          <p:cNvPr id="1034" name="공백기 04"/>
+          <p:cNvSpPr/>
+          <p:nvPr/>
+        </p:nvSpPr>
+        <p:spPr>
+          <a:xfrm>
+            <a:off x="6516736" y="2830000"/>
+            <a:ext cx="1779968" cy="0"/>
+          </a:xfrm>
+          <a:prstGeom prst="line">
+            <a:avLst/>
+          </a:prstGeom>
+          <a:noFill/>
+          <a:ln w="9525">
+            <a:solidFill>
+              <a:srgbClr val="3F87D0">
+                <a:alpha val="45000"/>
+              </a:srgbClr>
+            </a:solidFill>
+            <a:prstDash val="sysDot"/>
+          </a:ln>
+        </p:spPr>
+        <p:txBody>
+          <a:bodyPr wrap="none" anchor="ctr"/>
+          <a:lstStyle/>
+          <a:p>
+            <a:pPr algn="ctr">
+              <a:buNone/>
+            </a:pPr>
+            <a:endParaRPr lang="ko-KR"/>
+          </a:p>
+        </p:txBody>
+      </p:sp>
+      <p:sp>
+        <p:nvSpPr>
+          <p:cNvPr id="1035" name="기간바 04"/>
+          <p:cNvSpPr/>
+          <p:nvPr/>
+        </p:nvSpPr>
+        <p:spPr>
+          <a:xfrm>
+            <a:off x="8296704" y="2737500"/>
+            <a:ext cx="889984" cy="185000"/>
+          </a:xfrm>
+          <a:prstGeom prst="roundRect">
+            <a:avLst>
+              <a:gd name="adj" fmla="val 50000"/>
+            </a:avLst>
+          </a:prstGeom>
+          <a:gradFill flip="none" rotWithShape="1">
+            <a:gsLst>
+              <a:gs pos="0">
+                <a:srgbClr val="3F87D0"/>
+              </a:gs>
+              <a:gs pos="100000">
+                <a:srgbClr val="2C64A4"/>
+              </a:gs>
+            </a:gsLst>
+            <a:lin ang="0" scaled="0"/>
+          </a:gradFill>
+          <a:ln>
+            <a:noFill/>
+          </a:ln>
+        </p:spPr>
+        <p:txBody>
+          <a:bodyPr wrap="none" anchor="ctr"/>
+          <a:lstStyle/>
+          <a:p>
+            <a:pPr algn="ctr">
+              <a:buNone/>
+            </a:pPr>
+            <a:endParaRPr lang="ko-KR"/>
+          </a:p>
+        </p:txBody>
+      </p:sp>
+      <p:sp>
+        <p:nvSpPr>
+          <p:cNvPr id="1036" name="간트라벨 05"/>
+          <p:cNvSpPr txBox="1"/>
+          <p:nvPr/>
+        </p:nvSpPr>
+        <p:spPr>
+          <a:xfrm>
+            <a:off x="426800" y="3010000"/>
+            <a:ext cx="2350000" cy="360000"/>
+          </a:xfrm>
+          <a:prstGeom prst="rect">
+            <a:avLst/>
+          </a:prstGeom>
+          <a:noFill/>
+        </p:spPr>
+        <p:txBody>
+          <a:bodyPr wrap="square" lIns="0" tIns="0" rIns="0" bIns="0" anchor="ctr">
+            <a:noAutofit/>
+          </a:bodyPr>
+          <a:lstStyle/>
+          <a:p>
+            <a:pPr marL="0" indent="0" algn="l">
+              <a:buNone/>
+            </a:pPr>
+            <a:r>
+              <a:rPr lang="ko-KR" altLang="en-US" sz="1050" b="1" spc="-20" dirty="0">
+                <a:solidFill>
+                  <a:srgbClr val="2FB3D6"/>
+                </a:solidFill>
+                <a:latin typeface="맑은 고딕"/>
+                <a:ea typeface="맑은 고딕"/>
+                <a:cs typeface="Arial"/>
+              </a:rPr>
+              <a:t>05   </a:t>
+            </a:r>
+            <a:r>
+              <a:rPr lang="ko-KR" altLang="en-US" sz="1050" spc="-20" dirty="0">
+                <a:solidFill>
+                  <a:srgbClr val="44536A"/>
+                </a:solidFill>
+                <a:latin typeface="맑은 고딕"/>
+                <a:ea typeface="맑은 고딕"/>
+                <a:cs typeface="Arial"/>
+              </a:rPr>
+              <a:t>시스템 개발 Wrap-up</a:t>
+            </a:r>
+          </a:p>
+        </p:txBody>
+      </p:sp>
+      <p:sp>
+        <p:nvSpPr>
+          <p:cNvPr id="1037" name="기간바 05"/>
+          <p:cNvSpPr/>
+          <p:nvPr/>
+        </p:nvSpPr>
+        <p:spPr>
+          <a:xfrm>
+            <a:off x="9186688" y="3097500"/>
+            <a:ext cx="2669952" cy="185000"/>
+          </a:xfrm>
+          <a:prstGeom prst="roundRect">
+            <a:avLst>
+              <a:gd name="adj" fmla="val 50000"/>
+            </a:avLst>
+          </a:prstGeom>
+          <a:gradFill flip="none" rotWithShape="1">
+            <a:gsLst>
+              <a:gs pos="0">
+                <a:srgbClr val="2FB3D6"/>
+              </a:gs>
+              <a:gs pos="100000">
+                <a:srgbClr val="1F8AA8"/>
+              </a:gs>
+            </a:gsLst>
+            <a:lin ang="0" scaled="0"/>
+          </a:gradFill>
+          <a:ln>
+            <a:noFill/>
+          </a:ln>
+        </p:spPr>
+        <p:txBody>
+          <a:bodyPr wrap="none" anchor="ctr"/>
+          <a:lstStyle/>
+          <a:p>
+            <a:pPr algn="ctr">
+              <a:buNone/>
+            </a:pPr>
+            <a:endParaRPr lang="ko-KR"/>
+          </a:p>
+        </p:txBody>
+      </p:sp>
+      <p:sp>
+        <p:nvSpPr>
+          <p:cNvPr id="1038" name="카드 01"/>
+          <p:cNvSpPr/>
+          <p:nvPr/>
+        </p:nvSpPr>
+        <p:spPr>
+          <a:xfrm>
+            <a:off x="426800" y="3560000"/>
+            <a:ext cx="2176240" cy="2220000"/>
+          </a:xfrm>
+          <a:prstGeom prst="roundRect">
+            <a:avLst>
+              <a:gd name="adj" fmla="val 2600"/>
+            </a:avLst>
+          </a:prstGeom>
+          <a:solidFill>
+            <a:srgbClr val="F7F9FC"/>
+          </a:solidFill>
+          <a:ln w="9525">
+            <a:solidFill>
+              <a:srgbClr val="E4EAF2"/>
+            </a:solidFill>
+          </a:ln>
+          <a:effectLst>
+            <a:outerShdw blurRad="101600" dist="25400" dir="5400000" rotWithShape="0">
+              <a:srgbClr val="1B2A41">
+                <a:alpha val="14000"/>
+              </a:srgbClr>
+            </a:outerShdw>
+          </a:effectLst>
+        </p:spPr>
+        <p:txBody>
+          <a:bodyPr wrap="none" anchor="ctr"/>
+          <a:lstStyle/>
+          <a:p>
+            <a:pPr algn="ctr">
+              <a:buNone/>
+            </a:pPr>
+            <a:endParaRPr lang="ko-KR"/>
+          </a:p>
+        </p:txBody>
+      </p:sp>
+      <p:sp>
+        <p:nvSpPr>
+          <p:cNvPr id="1039" name="카드스트립 01"/>
+          <p:cNvSpPr/>
+          <p:nvPr/>
+        </p:nvSpPr>
+        <p:spPr>
+          <a:xfrm>
+            <a:off x="483382" y="3560000"/>
+            <a:ext cx="2063076" cy="42000"/>
+          </a:xfrm>
+          <a:prstGeom prst="rect">
+            <a:avLst/>
+          </a:prstGeom>
+          <a:gradFill flip="none" rotWithShape="1">
+            <a:gsLst>
+              <a:gs pos="0">
+                <a:srgbClr val="7A5AA8"/>
+              </a:gs>
+              <a:gs pos="100000">
+                <a:srgbClr val="5B4185"/>
+              </a:gs>
+            </a:gsLst>
+            <a:lin ang="0" scaled="0"/>
+          </a:gradFill>
+          <a:ln>
+            <a:noFill/>
+          </a:ln>
+        </p:spPr>
+        <p:txBody>
+          <a:bodyPr wrap="none" anchor="ctr"/>
+          <a:lstStyle/>
+          <a:p>
+            <a:pPr algn="ctr">
+              <a:buNone/>
+            </a:pPr>
+            <a:endParaRPr lang="ko-KR"/>
+          </a:p>
+        </p:txBody>
+      </p:sp>
+      <p:sp>
+        <p:nvSpPr>
+          <p:cNvPr id="1040" name="배지 01"/>
+          <p:cNvSpPr/>
+          <p:nvPr/>
+        </p:nvSpPr>
+        <p:spPr>
+          <a:xfrm>
+            <a:off x="556800" y="3690000"/>
+            <a:ext cx="340000" cy="340000"/>
+          </a:xfrm>
+          <a:prstGeom prst="roundRect">
+            <a:avLst>
+              <a:gd name="adj" fmla="val 28000"/>
+            </a:avLst>
+          </a:prstGeom>
+          <a:gradFill flip="none" rotWithShape="1">
+            <a:gsLst>
+              <a:gs pos="0">
+                <a:srgbClr val="7A5AA8"/>
+              </a:gs>
+              <a:gs pos="100000">
+                <a:srgbClr val="5B4185"/>
+              </a:gs>
+            </a:gsLst>
+            <a:lin ang="2700000" scaled="0"/>
+          </a:gradFill>
+          <a:ln>
+            <a:noFill/>
+          </a:ln>
+        </p:spPr>
+        <p:txBody>
+          <a:bodyPr wrap="square" lIns="0" tIns="0" rIns="0" bIns="0" anchor="ctr">
+            <a:noAutofit/>
+          </a:bodyPr>
+          <a:lstStyle/>
+          <a:p>
+            <a:pPr marL="0" indent="0" algn="ctr">
+              <a:buNone/>
+            </a:pPr>
+            <a:r>
+              <a:rPr lang="ko-KR" altLang="en-US" sz="1300" b="1" spc="-20" dirty="0">
+                <a:solidFill>
+                  <a:srgbClr val="FFFFFF"/>
+                </a:solidFill>
+                <a:latin typeface="맑은 고딕"/>
+                <a:ea typeface="맑은 고딕"/>
+                <a:cs typeface="Arial"/>
+              </a:rPr>
+              <a:t>01</a:t>
+            </a:r>
+          </a:p>
+        </p:txBody>
+      </p:sp>
+      <p:sp>
+        <p:nvSpPr>
+          <p:cNvPr id="1041" name="기간칩 01"/>
+          <p:cNvSpPr/>
+          <p:nvPr/>
+        </p:nvSpPr>
+        <p:spPr>
+          <a:xfrm>
+            <a:off x="1353040" y="3745000"/>
+            <a:ext cx="1120000" cy="230000"/>
+          </a:xfrm>
+          <a:prstGeom prst="roundRect">
+            <a:avLst>
+              <a:gd name="adj" fmla="val 45000"/>
+            </a:avLst>
+          </a:prstGeom>
+          <a:solidFill>
+            <a:srgbClr val="F1ECF7"/>
+          </a:solidFill>
+          <a:ln>
+            <a:noFill/>
+          </a:ln>
+        </p:spPr>
+        <p:txBody>
+          <a:bodyPr wrap="square" lIns="0" tIns="0" rIns="0" bIns="0" anchor="ctr">
+            <a:noAutofit/>
+          </a:bodyPr>
+          <a:lstStyle/>
+          <a:p>
+            <a:pPr marL="0" indent="0" algn="ctr">
+              <a:buNone/>
+            </a:pPr>
+            <a:r>
+              <a:rPr lang="ko-KR" altLang="en-US" sz="850" b="1" spc="-20" dirty="0">
+                <a:solidFill>
+                  <a:srgbClr val="5B4185"/>
+                </a:solidFill>
+                <a:latin typeface="맑은 고딕"/>
+                <a:ea typeface="맑은 고딕"/>
+                <a:cs typeface="Arial"/>
+              </a:rPr>
+              <a:t>~ 3월 중순</a:t>
+            </a:r>
+          </a:p>
+        </p:txBody>
+      </p:sp>
+      <p:sp>
+        <p:nvSpPr>
+          <p:cNvPr id="1042" name="카드제목 01"/>
+          <p:cNvSpPr txBox="1"/>
+          <p:nvPr/>
+        </p:nvSpPr>
+        <p:spPr>
+          <a:xfrm>
+            <a:off x="556800" y="4105000"/>
+            <a:ext cx="1916240" cy="500000"/>
+          </a:xfrm>
+          <a:prstGeom prst="rect">
+            <a:avLst/>
+          </a:prstGeom>
+          <a:noFill/>
+        </p:spPr>
+        <p:txBody>
+          <a:bodyPr wrap="square" lIns="0" tIns="0" rIns="0" bIns="0" anchor="t">
+            <a:noAutofit/>
+          </a:bodyPr>
+          <a:lstStyle/>
+          <a:p>
+            <a:pPr marL="0" indent="0" algn="l">
+              <a:lnSpc>
+                <a:spcPts val="1700"/>
+              </a:lnSpc>
+              <a:buNone/>
+            </a:pPr>
+            <a:r>
+              <a:rPr lang="ko-KR" altLang="en-US" sz="1300" b="1" spc="-20" dirty="0">
+                <a:solidFill>
+                  <a:srgbClr val="1B2A41"/>
+                </a:solidFill>
+                <a:latin typeface="맑은 고딕"/>
+                <a:ea typeface="맑은 고딕"/>
+                <a:cs typeface="Arial"/>
+              </a:rPr>
+              <a:t>KOM &amp; 방향성 검토</a:t>
+            </a:r>
+          </a:p>
+        </p:txBody>
+      </p:sp>
+      <p:sp>
+        <p:nvSpPr>
+          <p:cNvPr id="1043" name="카드선 01"/>
+          <p:cNvSpPr/>
+          <p:nvPr/>
+        </p:nvSpPr>
+        <p:spPr>
+          <a:xfrm>
+            <a:off x="556800" y="4650000"/>
+            <a:ext cx="1916240" cy="9525"/>
+          </a:xfrm>
+          <a:prstGeom prst="rect">
+            <a:avLst/>
+          </a:prstGeom>
+          <a:solidFill>
+            <a:srgbClr val="E3E9F0"/>
+          </a:solidFill>
+          <a:ln>
+            <a:noFill/>
+          </a:ln>
+        </p:spPr>
+        <p:txBody>
+          <a:bodyPr wrap="none" anchor="ctr"/>
+          <a:lstStyle/>
+          <a:p>
+            <a:pPr algn="ctr">
+              <a:buNone/>
+            </a:pPr>
+            <a:endParaRPr lang="ko-KR"/>
+          </a:p>
+        </p:txBody>
+      </p:sp>
+      <p:sp>
+        <p:nvSpPr>
+          <p:cNvPr id="1044" name="카드본문 01"/>
+          <p:cNvSpPr txBox="1"/>
+          <p:nvPr/>
+        </p:nvSpPr>
+        <p:spPr>
+          <a:xfrm>
+            <a:off x="556800" y="4720000"/>
+            <a:ext cx="1916240" cy="940000"/>
+          </a:xfrm>
+          <a:prstGeom prst="rect">
+            <a:avLst/>
+          </a:prstGeom>
+          <a:noFill/>
+        </p:spPr>
+        <p:txBody>
+          <a:bodyPr wrap="square" lIns="0" tIns="0" rIns="0" bIns="0" anchor="t">
+            <a:noAutofit/>
+          </a:bodyPr>
+          <a:lstStyle/>
+          <a:p>
+            <a:pPr marL="139700" indent="-139700" algn="l">
+              <a:lnSpc>
+                <a:spcPts val="1250"/>
+              </a:lnSpc>
+              <a:buClr>
+                <a:srgbClr val="7A5AA8"/>
+              </a:buClr>
+              <a:buSzPct val="90000"/>
+              <a:buFont typeface="Arial"/>
+              <a:buChar char="▪"/>
+            </a:pPr>
+            <a:r>
+              <a:rPr lang="ko-KR" altLang="en-US" sz="1000" spc="-20" dirty="0">
+                <a:solidFill>
+                  <a:srgbClr val="44536A"/>
+                </a:solidFill>
+                <a:latin typeface="맑은 고딕"/>
+                <a:ea typeface="맑은 고딕"/>
+                <a:cs typeface="Arial"/>
+              </a:rPr>
+              <a:t>TFT 결성</a:t>
+            </a:r>
+          </a:p>
+          <a:p>
+            <a:pPr marL="139700" indent="-139700" algn="l">
+              <a:lnSpc>
+                <a:spcPts val="1250"/>
+              </a:lnSpc>
+              <a:spcBef>
+                <a:spcPts val="450"/>
+              </a:spcBef>
+              <a:buClr>
+                <a:srgbClr val="7A5AA8"/>
+              </a:buClr>
+              <a:buSzPct val="90000"/>
+              <a:buFont typeface="Arial"/>
+              <a:buChar char="▪"/>
+            </a:pPr>
+            <a:r>
+              <a:rPr lang="ko-KR" altLang="en-US" sz="1000" spc="-20" dirty="0">
+                <a:solidFill>
+                  <a:srgbClr val="44536A"/>
+                </a:solidFill>
+                <a:latin typeface="맑은 고딕"/>
+                <a:ea typeface="맑은 고딕"/>
+                <a:cs typeface="Arial"/>
+              </a:rPr>
+              <a:t>현업 시스템 · 공종별 업무 파악</a:t>
+            </a:r>
+          </a:p>
+          <a:p>
+            <a:pPr marL="139700" indent="-139700" algn="l">
+              <a:lnSpc>
+                <a:spcPts val="1250"/>
+              </a:lnSpc>
+              <a:spcBef>
+                <a:spcPts val="450"/>
+              </a:spcBef>
+              <a:buClr>
+                <a:srgbClr val="7A5AA8"/>
+              </a:buClr>
+              <a:buSzPct val="90000"/>
+              <a:buFont typeface="Arial"/>
+              <a:buChar char="▪"/>
+            </a:pPr>
+            <a:r>
+              <a:rPr lang="ko-KR" altLang="en-US" sz="1000" spc="-20" dirty="0">
+                <a:solidFill>
+                  <a:srgbClr val="44536A"/>
+                </a:solidFill>
+                <a:latin typeface="맑은 고딕"/>
+                <a:ea typeface="맑은 고딕"/>
+                <a:cs typeface="Arial"/>
+              </a:rPr>
+              <a:t>2개 시스템 필요성 도출</a:t>
+            </a:r>
+          </a:p>
+        </p:txBody>
+      </p:sp>
+      <p:sp>
+        <p:nvSpPr>
+          <p:cNvPr id="1045" name="카드 02"/>
+          <p:cNvSpPr/>
+          <p:nvPr/>
+        </p:nvSpPr>
+        <p:spPr>
+          <a:xfrm>
+            <a:off x="2740200" y="3560000"/>
+            <a:ext cx="2176240" cy="2220000"/>
+          </a:xfrm>
+          <a:prstGeom prst="roundRect">
+            <a:avLst>
+              <a:gd name="adj" fmla="val 2600"/>
+            </a:avLst>
+          </a:prstGeom>
+          <a:solidFill>
+            <a:srgbClr val="F7F9FC"/>
+          </a:solidFill>
+          <a:ln w="9525">
+            <a:solidFill>
+              <a:srgbClr val="E4EAF2"/>
+            </a:solidFill>
+          </a:ln>
+          <a:effectLst>
+            <a:outerShdw blurRad="101600" dist="25400" dir="5400000" rotWithShape="0">
+              <a:srgbClr val="1B2A41">
+                <a:alpha val="14000"/>
+              </a:srgbClr>
+            </a:outerShdw>
+          </a:effectLst>
+        </p:spPr>
+        <p:txBody>
+          <a:bodyPr wrap="none" anchor="ctr"/>
+          <a:lstStyle/>
+          <a:p>
+            <a:pPr algn="ctr">
+              <a:buNone/>
+            </a:pPr>
+            <a:endParaRPr lang="ko-KR"/>
+          </a:p>
+        </p:txBody>
+      </p:sp>
+      <p:sp>
+        <p:nvSpPr>
+          <p:cNvPr id="1046" name="카드스트립 02"/>
+          <p:cNvSpPr/>
+          <p:nvPr/>
+        </p:nvSpPr>
+        <p:spPr>
+          <a:xfrm>
+            <a:off x="2796782" y="3560000"/>
+            <a:ext cx="2063076" cy="42000"/>
+          </a:xfrm>
+          <a:prstGeom prst="rect">
+            <a:avLst/>
+          </a:prstGeom>
+          <a:gradFill flip="none" rotWithShape="1">
+            <a:gsLst>
+              <a:gs pos="0">
+                <a:srgbClr val="5B54B8"/>
+              </a:gs>
+              <a:gs pos="100000">
+                <a:srgbClr val="423C90"/>
+              </a:gs>
+            </a:gsLst>
+            <a:lin ang="0" scaled="0"/>
+          </a:gradFill>
+          <a:ln>
+            <a:noFill/>
+          </a:ln>
+        </p:spPr>
+        <p:txBody>
+          <a:bodyPr wrap="none" anchor="ctr"/>
+          <a:lstStyle/>
+          <a:p>
+            <a:pPr algn="ctr">
+              <a:buNone/>
+            </a:pPr>
+            <a:endParaRPr lang="ko-KR"/>
+          </a:p>
+        </p:txBody>
+      </p:sp>
+      <p:sp>
+        <p:nvSpPr>
+          <p:cNvPr id="1047" name="배지 02"/>
+          <p:cNvSpPr/>
+          <p:nvPr/>
+        </p:nvSpPr>
+        <p:spPr>
+          <a:xfrm>
+            <a:off x="2870200" y="3690000"/>
+            <a:ext cx="340000" cy="340000"/>
+          </a:xfrm>
+          <a:prstGeom prst="roundRect">
+            <a:avLst>
+              <a:gd name="adj" fmla="val 28000"/>
+            </a:avLst>
+          </a:prstGeom>
+          <a:gradFill flip="none" rotWithShape="1">
+            <a:gsLst>
+              <a:gs pos="0">
+                <a:srgbClr val="5B54B8"/>
+              </a:gs>
+              <a:gs pos="100000">
+                <a:srgbClr val="423C90"/>
+              </a:gs>
+            </a:gsLst>
+            <a:lin ang="2700000" scaled="0"/>
+          </a:gradFill>
+          <a:ln>
+            <a:noFill/>
+          </a:ln>
+        </p:spPr>
+        <p:txBody>
+          <a:bodyPr wrap="square" lIns="0" tIns="0" rIns="0" bIns="0" anchor="ctr">
+            <a:noAutofit/>
+          </a:bodyPr>
+          <a:lstStyle/>
+          <a:p>
+            <a:pPr marL="0" indent="0" algn="ctr">
+              <a:buNone/>
+            </a:pPr>
+            <a:r>
+              <a:rPr lang="ko-KR" altLang="en-US" sz="1300" b="1" spc="-20" dirty="0">
+                <a:solidFill>
+                  <a:srgbClr val="FFFFFF"/>
+                </a:solidFill>
+                <a:latin typeface="맑은 고딕"/>
+                <a:ea typeface="맑은 고딕"/>
+                <a:cs typeface="Arial"/>
+              </a:rPr>
+              <a:t>02</a:t>
+            </a:r>
+          </a:p>
+        </p:txBody>
+      </p:sp>
+      <p:sp>
+        <p:nvSpPr>
+          <p:cNvPr id="1048" name="기간칩 02"/>
+          <p:cNvSpPr/>
+          <p:nvPr/>
+        </p:nvSpPr>
+        <p:spPr>
+          <a:xfrm>
+            <a:off x="3666440" y="3745000"/>
+            <a:ext cx="1120000" cy="230000"/>
+          </a:xfrm>
+          <a:prstGeom prst="roundRect">
+            <a:avLst>
+              <a:gd name="adj" fmla="val 45000"/>
+            </a:avLst>
+          </a:prstGeom>
+          <a:solidFill>
+            <a:srgbClr val="EDECF8"/>
+          </a:solidFill>
+          <a:ln>
+            <a:noFill/>
+          </a:ln>
+        </p:spPr>
+        <p:txBody>
+          <a:bodyPr wrap="square" lIns="0" tIns="0" rIns="0" bIns="0" anchor="ctr">
+            <a:noAutofit/>
+          </a:bodyPr>
+          <a:lstStyle/>
+          <a:p>
+            <a:pPr marL="0" indent="0" algn="ctr">
+              <a:buNone/>
+            </a:pPr>
+            <a:r>
+              <a:rPr lang="ko-KR" altLang="en-US" sz="850" b="1" spc="-20" dirty="0">
+                <a:solidFill>
+                  <a:srgbClr val="423C90"/>
+                </a:solidFill>
+                <a:latin typeface="맑은 고딕"/>
+                <a:ea typeface="맑은 고딕"/>
+                <a:cs typeface="Arial"/>
+              </a:rPr>
+              <a:t>3월 중순 ~ 4월 중순</a:t>
+            </a:r>
+          </a:p>
+        </p:txBody>
+      </p:sp>
+      <p:sp>
+        <p:nvSpPr>
+          <p:cNvPr id="1049" name="카드제목 02"/>
+          <p:cNvSpPr txBox="1"/>
+          <p:nvPr/>
+        </p:nvSpPr>
+        <p:spPr>
+          <a:xfrm>
+            <a:off x="2870200" y="4105000"/>
+            <a:ext cx="1916240" cy="500000"/>
+          </a:xfrm>
+          <a:prstGeom prst="rect">
+            <a:avLst/>
+          </a:prstGeom>
+          <a:noFill/>
+        </p:spPr>
+        <p:txBody>
+          <a:bodyPr wrap="square" lIns="0" tIns="0" rIns="0" bIns="0" anchor="t">
+            <a:noAutofit/>
+          </a:bodyPr>
+          <a:lstStyle/>
+          <a:p>
+            <a:pPr marL="0" indent="0" algn="l">
+              <a:lnSpc>
+                <a:spcPts val="1700"/>
+              </a:lnSpc>
+              <a:buNone/>
+            </a:pPr>
+            <a:r>
+              <a:rPr lang="ko-KR" altLang="en-US" sz="1300" b="1" spc="-20" dirty="0">
+                <a:solidFill>
+                  <a:srgbClr val="1B2A41"/>
+                </a:solidFill>
+                <a:latin typeface="맑은 고딕"/>
+                <a:ea typeface="맑은 고딕"/>
+                <a:cs typeface="Arial"/>
+              </a:rPr>
+              <a:t>L&amp;L System Mgmt</a:t>
+            </a:r>
+          </a:p>
+        </p:txBody>
+      </p:sp>
+      <p:sp>
+        <p:nvSpPr>
+          <p:cNvPr id="1050" name="카드선 02"/>
+          <p:cNvSpPr/>
+          <p:nvPr/>
+        </p:nvSpPr>
+        <p:spPr>
+          <a:xfrm>
+            <a:off x="2870200" y="4650000"/>
+            <a:ext cx="1916240" cy="9525"/>
+          </a:xfrm>
+          <a:prstGeom prst="rect">
+            <a:avLst/>
+          </a:prstGeom>
+          <a:solidFill>
+            <a:srgbClr val="E3E9F0"/>
+          </a:solidFill>
+          <a:ln>
+            <a:noFill/>
+          </a:ln>
+        </p:spPr>
+        <p:txBody>
+          <a:bodyPr wrap="none" anchor="ctr"/>
+          <a:lstStyle/>
+          <a:p>
+            <a:pPr algn="ctr">
+              <a:buNone/>
+            </a:pPr>
+            <a:endParaRPr lang="ko-KR"/>
+          </a:p>
+        </p:txBody>
+      </p:sp>
+      <p:sp>
+        <p:nvSpPr>
+          <p:cNvPr id="1051" name="카드본문 02"/>
+          <p:cNvSpPr txBox="1"/>
+          <p:nvPr/>
+        </p:nvSpPr>
+        <p:spPr>
+          <a:xfrm>
+            <a:off x="2870200" y="4720000"/>
+            <a:ext cx="1916240" cy="940000"/>
+          </a:xfrm>
+          <a:prstGeom prst="rect">
+            <a:avLst/>
+          </a:prstGeom>
+          <a:noFill/>
+        </p:spPr>
+        <p:txBody>
+          <a:bodyPr wrap="square" lIns="0" tIns="0" rIns="0" bIns="0" anchor="t">
+            <a:noAutofit/>
+          </a:bodyPr>
+          <a:lstStyle/>
+          <a:p>
+            <a:pPr marL="139700" indent="-139700" algn="l">
+              <a:lnSpc>
+                <a:spcPts val="1250"/>
+              </a:lnSpc>
+              <a:buClr>
+                <a:srgbClr val="5B54B8"/>
+              </a:buClr>
+              <a:buSzPct val="90000"/>
+              <a:buFont typeface="Arial"/>
+              <a:buChar char="▪"/>
+            </a:pPr>
+            <a:r>
+              <a:rPr lang="ko-KR" altLang="en-US" sz="1000" spc="-20" dirty="0">
+                <a:solidFill>
+                  <a:srgbClr val="44536A"/>
+                </a:solidFill>
+                <a:latin typeface="맑은 고딕"/>
+                <a:ea typeface="맑은 고딕"/>
+                <a:cs typeface="Arial"/>
+              </a:rPr>
+              <a:t>HMAP 기반 L&amp;L 시스템 개발</a:t>
+            </a:r>
+          </a:p>
+          <a:p>
+            <a:pPr marL="139700" indent="-139700" algn="l">
+              <a:lnSpc>
+                <a:spcPts val="1250"/>
+              </a:lnSpc>
+              <a:spcBef>
+                <a:spcPts val="450"/>
+              </a:spcBef>
+              <a:buClr>
+                <a:srgbClr val="5B54B8"/>
+              </a:buClr>
+              <a:buSzPct val="90000"/>
+              <a:buFont typeface="Arial"/>
+              <a:buChar char="▪"/>
+            </a:pPr>
+            <a:r>
+              <a:rPr lang="ko-KR" altLang="en-US" sz="1000" spc="-20" dirty="0">
+                <a:solidFill>
+                  <a:srgbClr val="44536A"/>
+                </a:solidFill>
+                <a:latin typeface="맑은 고딕"/>
+                <a:ea typeface="맑은 고딕"/>
+                <a:cs typeface="Arial"/>
+              </a:rPr>
+              <a:t>착수 전 사례 검토 체계 구축</a:t>
+            </a:r>
+          </a:p>
+          <a:p>
+            <a:pPr marL="139700" indent="-139700" algn="l">
+              <a:lnSpc>
+                <a:spcPts val="1250"/>
+              </a:lnSpc>
+              <a:spcBef>
+                <a:spcPts val="450"/>
+              </a:spcBef>
+              <a:buClr>
+                <a:srgbClr val="5B54B8"/>
+              </a:buClr>
+              <a:buSzPct val="90000"/>
+              <a:buFont typeface="Arial"/>
+              <a:buChar char="▪"/>
+            </a:pPr>
+            <a:r>
+              <a:rPr lang="ko-KR" altLang="en-US" sz="1000" spc="-20" dirty="0">
+                <a:solidFill>
+                  <a:srgbClr val="44536A"/>
+                </a:solidFill>
+                <a:latin typeface="맑은 고딕"/>
+                <a:ea typeface="맑은 고딕"/>
+                <a:cs typeface="Arial"/>
+              </a:rPr>
+              <a:t>미반영 건 Trend Mgmt 이관</a:t>
+            </a:r>
+          </a:p>
+        </p:txBody>
+      </p:sp>
+      <p:sp>
+        <p:nvSpPr>
+          <p:cNvPr id="1052" name="카드 03"/>
+          <p:cNvSpPr/>
+          <p:nvPr/>
+        </p:nvSpPr>
+        <p:spPr>
+          <a:xfrm>
+            <a:off x="5053600" y="3560000"/>
+            <a:ext cx="2176240" cy="2220000"/>
+          </a:xfrm>
+          <a:prstGeom prst="roundRect">
+            <a:avLst>
+              <a:gd name="adj" fmla="val 2600"/>
+            </a:avLst>
+          </a:prstGeom>
+          <a:solidFill>
+            <a:srgbClr val="F7F9FC"/>
+          </a:solidFill>
+          <a:ln w="9525">
+            <a:solidFill>
+              <a:srgbClr val="E4EAF2"/>
+            </a:solidFill>
+          </a:ln>
+          <a:effectLst>
+            <a:outerShdw blurRad="101600" dist="25400" dir="5400000" rotWithShape="0">
+              <a:srgbClr val="1B2A41">
+                <a:alpha val="14000"/>
+              </a:srgbClr>
+            </a:outerShdw>
+          </a:effectLst>
+        </p:spPr>
+        <p:txBody>
+          <a:bodyPr wrap="none" anchor="ctr"/>
+          <a:lstStyle/>
+          <a:p>
+            <a:pPr algn="ctr">
+              <a:buNone/>
+            </a:pPr>
+            <a:endParaRPr lang="ko-KR"/>
+          </a:p>
+        </p:txBody>
+      </p:sp>
+      <p:sp>
+        <p:nvSpPr>
+          <p:cNvPr id="1053" name="카드스트립 03"/>
+          <p:cNvSpPr/>
+          <p:nvPr/>
+        </p:nvSpPr>
+        <p:spPr>
+          <a:xfrm>
+            <a:off x="5110182" y="3560000"/>
+            <a:ext cx="2063076" cy="42000"/>
+          </a:xfrm>
+          <a:prstGeom prst="rect">
+            <a:avLst/>
+          </a:prstGeom>
+          <a:gradFill flip="none" rotWithShape="1">
+            <a:gsLst>
+              <a:gs pos="0">
+                <a:srgbClr val="4A63C4"/>
+              </a:gs>
+              <a:gs pos="100000">
+                <a:srgbClr val="35499C"/>
+              </a:gs>
+            </a:gsLst>
+            <a:lin ang="0" scaled="0"/>
+          </a:gradFill>
+          <a:ln>
+            <a:noFill/>
+          </a:ln>
+        </p:spPr>
+        <p:txBody>
+          <a:bodyPr wrap="none" anchor="ctr"/>
+          <a:lstStyle/>
+          <a:p>
+            <a:pPr algn="ctr">
+              <a:buNone/>
+            </a:pPr>
+            <a:endParaRPr lang="ko-KR"/>
+          </a:p>
+        </p:txBody>
+      </p:sp>
+      <p:sp>
+        <p:nvSpPr>
+          <p:cNvPr id="1054" name="배지 03"/>
+          <p:cNvSpPr/>
+          <p:nvPr/>
+        </p:nvSpPr>
+        <p:spPr>
+          <a:xfrm>
+            <a:off x="5183600" y="3690000"/>
+            <a:ext cx="340000" cy="340000"/>
+          </a:xfrm>
+          <a:prstGeom prst="roundRect">
+            <a:avLst>
+              <a:gd name="adj" fmla="val 28000"/>
+            </a:avLst>
+          </a:prstGeom>
+          <a:gradFill flip="none" rotWithShape="1">
+            <a:gsLst>
+              <a:gs pos="0">
+                <a:srgbClr val="4A63C4"/>
+              </a:gs>
+              <a:gs pos="100000">
+                <a:srgbClr val="35499C"/>
+              </a:gs>
+            </a:gsLst>
+            <a:lin ang="2700000" scaled="0"/>
+          </a:gradFill>
+          <a:ln>
+            <a:noFill/>
+          </a:ln>
+        </p:spPr>
+        <p:txBody>
+          <a:bodyPr wrap="square" lIns="0" tIns="0" rIns="0" bIns="0" anchor="ctr">
+            <a:noAutofit/>
+          </a:bodyPr>
+          <a:lstStyle/>
+          <a:p>
+            <a:pPr marL="0" indent="0" algn="ctr">
+              <a:buNone/>
+            </a:pPr>
+            <a:r>
+              <a:rPr lang="ko-KR" altLang="en-US" sz="1300" b="1" spc="-20" dirty="0">
+                <a:solidFill>
+                  <a:srgbClr val="FFFFFF"/>
+                </a:solidFill>
+                <a:latin typeface="맑은 고딕"/>
+                <a:ea typeface="맑은 고딕"/>
+                <a:cs typeface="Arial"/>
+              </a:rPr>
+              <a:t>03</a:t>
+            </a:r>
+          </a:p>
+        </p:txBody>
+      </p:sp>
+      <p:sp>
+        <p:nvSpPr>
+          <p:cNvPr id="1055" name="기간칩 03"/>
+          <p:cNvSpPr/>
+          <p:nvPr/>
+        </p:nvSpPr>
+        <p:spPr>
+          <a:xfrm>
+            <a:off x="5979840" y="3745000"/>
+            <a:ext cx="1120000" cy="230000"/>
+          </a:xfrm>
+          <a:prstGeom prst="roundRect">
+            <a:avLst>
+              <a:gd name="adj" fmla="val 45000"/>
+            </a:avLst>
+          </a:prstGeom>
+          <a:solidFill>
+            <a:srgbClr val="EAEEFA"/>
+          </a:solidFill>
+          <a:ln>
+            <a:noFill/>
+          </a:ln>
+        </p:spPr>
+        <p:txBody>
+          <a:bodyPr wrap="square" lIns="0" tIns="0" rIns="0" bIns="0" anchor="ctr">
+            <a:noAutofit/>
+          </a:bodyPr>
+          <a:lstStyle/>
+          <a:p>
+            <a:pPr marL="0" indent="0" algn="ctr">
+              <a:buNone/>
+            </a:pPr>
+            <a:r>
+              <a:rPr lang="ko-KR" altLang="en-US" sz="850" b="1" spc="-20" dirty="0">
+                <a:solidFill>
+                  <a:srgbClr val="35499C"/>
+                </a:solidFill>
+                <a:latin typeface="맑은 고딕"/>
+                <a:ea typeface="맑은 고딕"/>
+                <a:cs typeface="Arial"/>
+              </a:rPr>
+              <a:t>4월 중순 ~ 5월 중순</a:t>
+            </a:r>
+          </a:p>
+        </p:txBody>
+      </p:sp>
+      <p:sp>
+        <p:nvSpPr>
+          <p:cNvPr id="1056" name="카드제목 03"/>
+          <p:cNvSpPr txBox="1"/>
+          <p:nvPr/>
+        </p:nvSpPr>
+        <p:spPr>
+          <a:xfrm>
+            <a:off x="5183600" y="4105000"/>
+            <a:ext cx="1916240" cy="500000"/>
+          </a:xfrm>
+          <a:prstGeom prst="rect">
+            <a:avLst/>
+          </a:prstGeom>
+          <a:noFill/>
+        </p:spPr>
+        <p:txBody>
+          <a:bodyPr wrap="square" lIns="0" tIns="0" rIns="0" bIns="0" anchor="t">
+            <a:noAutofit/>
+          </a:bodyPr>
+          <a:lstStyle/>
+          <a:p>
+            <a:pPr marL="0" indent="0" algn="l">
+              <a:lnSpc>
+                <a:spcPts val="1700"/>
+              </a:lnSpc>
+              <a:buNone/>
+            </a:pPr>
+            <a:r>
+              <a:rPr lang="ko-KR" altLang="en-US" sz="1300" b="1" spc="-20" dirty="0">
+                <a:solidFill>
+                  <a:srgbClr val="1B2A41"/>
+                </a:solidFill>
+                <a:latin typeface="맑은 고딕"/>
+                <a:ea typeface="맑은 고딕"/>
+                <a:cs typeface="Arial"/>
+              </a:rPr>
+              <a:t>Trend Mgmt</a:t>
+            </a:r>
+          </a:p>
+        </p:txBody>
+      </p:sp>
+      <p:sp>
+        <p:nvSpPr>
+          <p:cNvPr id="1057" name="카드선 03"/>
+          <p:cNvSpPr/>
+          <p:nvPr/>
+        </p:nvSpPr>
+        <p:spPr>
+          <a:xfrm>
+            <a:off x="5183600" y="4650000"/>
+            <a:ext cx="1916240" cy="9525"/>
+          </a:xfrm>
+          <a:prstGeom prst="rect">
+            <a:avLst/>
+          </a:prstGeom>
+          <a:solidFill>
+            <a:srgbClr val="E3E9F0"/>
+          </a:solidFill>
+          <a:ln>
+            <a:noFill/>
+          </a:ln>
+        </p:spPr>
+        <p:txBody>
+          <a:bodyPr wrap="none" anchor="ctr"/>
+          <a:lstStyle/>
+          <a:p>
+            <a:pPr algn="ctr">
+              <a:buNone/>
+            </a:pPr>
+            <a:endParaRPr lang="ko-KR"/>
+          </a:p>
+        </p:txBody>
+      </p:sp>
+      <p:sp>
+        <p:nvSpPr>
+          <p:cNvPr id="1058" name="카드본문 03"/>
+          <p:cNvSpPr txBox="1"/>
+          <p:nvPr/>
+        </p:nvSpPr>
+        <p:spPr>
+          <a:xfrm>
+            <a:off x="5183600" y="4720000"/>
+            <a:ext cx="1916240" cy="940000"/>
+          </a:xfrm>
+          <a:prstGeom prst="rect">
+            <a:avLst/>
+          </a:prstGeom>
+          <a:noFill/>
+        </p:spPr>
+        <p:txBody>
+          <a:bodyPr wrap="square" lIns="0" tIns="0" rIns="0" bIns="0" anchor="t">
+            <a:noAutofit/>
+          </a:bodyPr>
+          <a:lstStyle/>
+          <a:p>
+            <a:pPr marL="139700" indent="-139700" algn="l">
+              <a:lnSpc>
+                <a:spcPts val="1250"/>
+              </a:lnSpc>
+              <a:buClr>
+                <a:srgbClr val="4A63C4"/>
+              </a:buClr>
+              <a:buSzPct val="90000"/>
+              <a:buFont typeface="Arial"/>
+              <a:buChar char="▪"/>
+            </a:pPr>
+            <a:r>
+              <a:rPr lang="ko-KR" altLang="en-US" sz="1000" spc="-20" dirty="0">
+                <a:solidFill>
+                  <a:srgbClr val="44536A"/>
+                </a:solidFill>
+                <a:latin typeface="맑은 고딕"/>
+                <a:ea typeface="맑은 고딕"/>
+                <a:cs typeface="Arial"/>
+              </a:rPr>
+              <a:t>SAT4 · CSSP 자료 연계</a:t>
+            </a:r>
+          </a:p>
+          <a:p>
+            <a:pPr marL="139700" indent="-139700" algn="l">
+              <a:lnSpc>
+                <a:spcPts val="1250"/>
+              </a:lnSpc>
+              <a:spcBef>
+                <a:spcPts val="450"/>
+              </a:spcBef>
+              <a:buClr>
+                <a:srgbClr val="4A63C4"/>
+              </a:buClr>
+              <a:buSzPct val="90000"/>
+              <a:buFont typeface="Arial"/>
+              <a:buChar char="▪"/>
+            </a:pPr>
+            <a:r>
+              <a:rPr lang="ko-KR" altLang="en-US" sz="1000" spc="-20" dirty="0">
+                <a:solidFill>
+                  <a:srgbClr val="44536A"/>
+                </a:solidFill>
+                <a:latin typeface="맑은 고딕"/>
+                <a:ea typeface="맑은 고딕"/>
+                <a:cs typeface="Arial"/>
+              </a:rPr>
+              <a:t>입찰 대비 변경사항 기록 · 관리</a:t>
+            </a:r>
+          </a:p>
+          <a:p>
+            <a:pPr marL="139700" indent="-139700" algn="l">
+              <a:lnSpc>
+                <a:spcPts val="1250"/>
+              </a:lnSpc>
+              <a:spcBef>
+                <a:spcPts val="450"/>
+              </a:spcBef>
+              <a:buClr>
+                <a:srgbClr val="4A63C4"/>
+              </a:buClr>
+              <a:buSzPct val="90000"/>
+              <a:buFont typeface="Arial"/>
+              <a:buChar char="▪"/>
+            </a:pPr>
+            <a:r>
+              <a:rPr lang="ko-KR" altLang="en-US" sz="1000" spc="-20" dirty="0">
+                <a:solidFill>
+                  <a:srgbClr val="44536A"/>
+                </a:solidFill>
+                <a:latin typeface="맑은 고딕"/>
+                <a:ea typeface="맑은 고딕"/>
+                <a:cs typeface="Arial"/>
+              </a:rPr>
+              <a:t>Log → Master → Trend 3단 분류</a:t>
+            </a:r>
+          </a:p>
+        </p:txBody>
+      </p:sp>
+      <p:sp>
+        <p:nvSpPr>
+          <p:cNvPr id="1059" name="카드 04"/>
+          <p:cNvSpPr/>
+          <p:nvPr/>
+        </p:nvSpPr>
+        <p:spPr>
+          <a:xfrm>
+            <a:off x="7367000" y="3560000"/>
+            <a:ext cx="2176240" cy="2220000"/>
+          </a:xfrm>
+          <a:prstGeom prst="roundRect">
+            <a:avLst>
+              <a:gd name="adj" fmla="val 2600"/>
+            </a:avLst>
+          </a:prstGeom>
+          <a:solidFill>
+            <a:srgbClr val="F7F9FC"/>
+          </a:solidFill>
+          <a:ln w="9525">
+            <a:solidFill>
+              <a:srgbClr val="E4EAF2"/>
+            </a:solidFill>
+          </a:ln>
+          <a:effectLst>
+            <a:outerShdw blurRad="101600" dist="25400" dir="5400000" rotWithShape="0">
+              <a:srgbClr val="1B2A41">
+                <a:alpha val="14000"/>
+              </a:srgbClr>
+            </a:outerShdw>
+          </a:effectLst>
+        </p:spPr>
+        <p:txBody>
+          <a:bodyPr wrap="none" anchor="ctr"/>
+          <a:lstStyle/>
+          <a:p>
+            <a:pPr algn="ctr">
+              <a:buNone/>
+            </a:pPr>
+            <a:endParaRPr lang="ko-KR"/>
+          </a:p>
+        </p:txBody>
+      </p:sp>
+      <p:sp>
+        <p:nvSpPr>
+          <p:cNvPr id="1060" name="카드스트립 04"/>
+          <p:cNvSpPr/>
+          <p:nvPr/>
+        </p:nvSpPr>
+        <p:spPr>
+          <a:xfrm>
+            <a:off x="7423582" y="3560000"/>
+            <a:ext cx="2063076" cy="42000"/>
+          </a:xfrm>
+          <a:prstGeom prst="rect">
+            <a:avLst/>
+          </a:prstGeom>
+          <a:gradFill flip="none" rotWithShape="1">
+            <a:gsLst>
+              <a:gs pos="0">
+                <a:srgbClr val="3F87D0"/>
+              </a:gs>
+              <a:gs pos="100000">
+                <a:srgbClr val="2C64A4"/>
+              </a:gs>
+            </a:gsLst>
+            <a:lin ang="0" scaled="0"/>
+          </a:gradFill>
+          <a:ln>
+            <a:noFill/>
+          </a:ln>
+        </p:spPr>
+        <p:txBody>
+          <a:bodyPr wrap="none" anchor="ctr"/>
+          <a:lstStyle/>
+          <a:p>
+            <a:pPr algn="ctr">
+              <a:buNone/>
+            </a:pPr>
+            <a:endParaRPr lang="ko-KR"/>
+          </a:p>
+        </p:txBody>
+      </p:sp>
+      <p:sp>
+        <p:nvSpPr>
+          <p:cNvPr id="1061" name="배지 04"/>
+          <p:cNvSpPr/>
+          <p:nvPr/>
+        </p:nvSpPr>
+        <p:spPr>
+          <a:xfrm>
+            <a:off x="7497000" y="3690000"/>
+            <a:ext cx="340000" cy="340000"/>
+          </a:xfrm>
+          <a:prstGeom prst="roundRect">
+            <a:avLst>
+              <a:gd name="adj" fmla="val 28000"/>
+            </a:avLst>
+          </a:prstGeom>
+          <a:gradFill flip="none" rotWithShape="1">
+            <a:gsLst>
+              <a:gs pos="0">
+                <a:srgbClr val="3F87D0"/>
+              </a:gs>
+              <a:gs pos="100000">
+                <a:srgbClr val="2C64A4"/>
+              </a:gs>
+            </a:gsLst>
+            <a:lin ang="2700000" scaled="0"/>
+          </a:gradFill>
+          <a:ln>
+            <a:noFill/>
+          </a:ln>
+        </p:spPr>
+        <p:txBody>
+          <a:bodyPr wrap="square" lIns="0" tIns="0" rIns="0" bIns="0" anchor="ctr">
+            <a:noAutofit/>
+          </a:bodyPr>
+          <a:lstStyle/>
+          <a:p>
+            <a:pPr marL="0" indent="0" algn="ctr">
+              <a:buNone/>
+            </a:pPr>
+            <a:r>
+              <a:rPr lang="ko-KR" altLang="en-US" sz="1300" b="1" spc="-20" dirty="0">
+                <a:solidFill>
+                  <a:srgbClr val="FFFFFF"/>
+                </a:solidFill>
+                <a:latin typeface="맑은 고딕"/>
+                <a:ea typeface="맑은 고딕"/>
+                <a:cs typeface="Arial"/>
+              </a:rPr>
+              <a:t>04</a:t>
+            </a:r>
+          </a:p>
+        </p:txBody>
+      </p:sp>
+      <p:sp>
+        <p:nvSpPr>
+          <p:cNvPr id="1062" name="기간칩 04"/>
+          <p:cNvSpPr/>
+          <p:nvPr/>
+        </p:nvSpPr>
+        <p:spPr>
+          <a:xfrm>
+            <a:off x="8293240" y="3745000"/>
+            <a:ext cx="1120000" cy="230000"/>
+          </a:xfrm>
+          <a:prstGeom prst="roundRect">
+            <a:avLst>
+              <a:gd name="adj" fmla="val 45000"/>
+            </a:avLst>
+          </a:prstGeom>
+          <a:solidFill>
+            <a:srgbClr val="E8F1FB"/>
+          </a:solidFill>
+          <a:ln>
+            <a:noFill/>
+          </a:ln>
+        </p:spPr>
+        <p:txBody>
+          <a:bodyPr wrap="square" lIns="0" tIns="0" rIns="0" bIns="0" anchor="ctr">
+            <a:noAutofit/>
+          </a:bodyPr>
+          <a:lstStyle/>
+          <a:p>
+            <a:pPr marL="0" indent="0" algn="ctr">
+              <a:buNone/>
+            </a:pPr>
+            <a:r>
+              <a:rPr lang="ko-KR" altLang="en-US" sz="850" b="1" spc="-20" dirty="0">
+                <a:solidFill>
+                  <a:srgbClr val="2C64A4"/>
+                </a:solidFill>
+                <a:latin typeface="맑은 고딕"/>
+                <a:ea typeface="맑은 고딕"/>
+                <a:cs typeface="Arial"/>
+              </a:rPr>
+              <a:t>5월 중순 ~ 6월, 9월</a:t>
+            </a:r>
+          </a:p>
+        </p:txBody>
+      </p:sp>
+      <p:sp>
+        <p:nvSpPr>
+          <p:cNvPr id="1063" name="카드제목 04"/>
+          <p:cNvSpPr txBox="1"/>
+          <p:nvPr/>
+        </p:nvSpPr>
+        <p:spPr>
+          <a:xfrm>
+            <a:off x="7497000" y="4105000"/>
+            <a:ext cx="1916240" cy="500000"/>
+          </a:xfrm>
+          <a:prstGeom prst="rect">
+            <a:avLst/>
+          </a:prstGeom>
+          <a:noFill/>
+        </p:spPr>
+        <p:txBody>
+          <a:bodyPr wrap="square" lIns="0" tIns="0" rIns="0" bIns="0" anchor="t">
+            <a:noAutofit/>
+          </a:bodyPr>
+          <a:lstStyle/>
+          <a:p>
+            <a:pPr marL="0" indent="0" algn="l">
+              <a:lnSpc>
+                <a:spcPts val="1700"/>
+              </a:lnSpc>
+              <a:buNone/>
+            </a:pPr>
+            <a:r>
+              <a:rPr lang="ko-KR" altLang="en-US" sz="1300" b="1" spc="-20" dirty="0">
+                <a:solidFill>
+                  <a:srgbClr val="1B2A41"/>
+                </a:solidFill>
+                <a:latin typeface="맑은 고딕"/>
+                <a:ea typeface="맑은 고딕"/>
+                <a:cs typeface="Arial"/>
+              </a:rPr>
+              <a:t>Risk Mgmt</a:t>
+            </a:r>
+          </a:p>
+        </p:txBody>
+      </p:sp>
+      <p:sp>
+        <p:nvSpPr>
+          <p:cNvPr id="1064" name="카드선 04"/>
+          <p:cNvSpPr/>
+          <p:nvPr/>
+        </p:nvSpPr>
+        <p:spPr>
+          <a:xfrm>
+            <a:off x="7497000" y="4650000"/>
+            <a:ext cx="1916240" cy="9525"/>
+          </a:xfrm>
+          <a:prstGeom prst="rect">
+            <a:avLst/>
+          </a:prstGeom>
+          <a:solidFill>
+            <a:srgbClr val="E3E9F0"/>
+          </a:solidFill>
+          <a:ln>
+            <a:noFill/>
+          </a:ln>
+        </p:spPr>
+        <p:txBody>
+          <a:bodyPr wrap="none" anchor="ctr"/>
+          <a:lstStyle/>
+          <a:p>
+            <a:pPr algn="ctr">
+              <a:buNone/>
+            </a:pPr>
+            <a:endParaRPr lang="ko-KR"/>
+          </a:p>
+        </p:txBody>
+      </p:sp>
+      <p:sp>
+        <p:nvSpPr>
+          <p:cNvPr id="1065" name="카드본문 04"/>
+          <p:cNvSpPr txBox="1"/>
+          <p:nvPr/>
+        </p:nvSpPr>
+        <p:spPr>
+          <a:xfrm>
+            <a:off x="7497000" y="4720000"/>
+            <a:ext cx="1916240" cy="940000"/>
+          </a:xfrm>
+          <a:prstGeom prst="rect">
+            <a:avLst/>
+          </a:prstGeom>
+          <a:noFill/>
+        </p:spPr>
+        <p:txBody>
+          <a:bodyPr wrap="square" lIns="0" tIns="0" rIns="0" bIns="0" anchor="t">
+            <a:noAutofit/>
+          </a:bodyPr>
+          <a:lstStyle/>
+          <a:p>
+            <a:pPr marL="139700" indent="-139700" algn="l">
+              <a:lnSpc>
+                <a:spcPts val="1250"/>
+              </a:lnSpc>
+              <a:buClr>
+                <a:srgbClr val="3F87D0"/>
+              </a:buClr>
+              <a:buSzPct val="90000"/>
+              <a:buFont typeface="Arial"/>
+              <a:buChar char="▪"/>
+            </a:pPr>
+            <a:r>
+              <a:rPr lang="ko-KR" altLang="en-US" sz="1000" spc="-20" dirty="0">
+                <a:solidFill>
+                  <a:srgbClr val="44536A"/>
+                </a:solidFill>
+                <a:latin typeface="맑은 고딕"/>
+                <a:ea typeface="맑은 고딕"/>
+                <a:cs typeface="Arial"/>
+              </a:rPr>
+              <a:t>L&amp;L 에 리스크 개념 도입</a:t>
+            </a:r>
+          </a:p>
+          <a:p>
+            <a:pPr marL="139700" indent="-139700" algn="l">
+              <a:lnSpc>
+                <a:spcPts val="1250"/>
+              </a:lnSpc>
+              <a:spcBef>
+                <a:spcPts val="450"/>
+              </a:spcBef>
+              <a:buClr>
+                <a:srgbClr val="3F87D0"/>
+              </a:buClr>
+              <a:buSzPct val="90000"/>
+              <a:buFont typeface="Arial"/>
+              <a:buChar char="▪"/>
+            </a:pPr>
+            <a:r>
+              <a:rPr lang="ko-KR" altLang="en-US" sz="1000" spc="-20" dirty="0">
+                <a:solidFill>
+                  <a:srgbClr val="44536A"/>
+                </a:solidFill>
+                <a:latin typeface="맑은 고딕"/>
+                <a:ea typeface="맑은 고딕"/>
+                <a:cs typeface="Arial"/>
+              </a:rPr>
+              <a:t>Trend Mgmt 에 리스크 개념 도입</a:t>
+            </a:r>
+          </a:p>
+        </p:txBody>
+      </p:sp>
+      <p:sp>
+        <p:nvSpPr>
+          <p:cNvPr id="1066" name="카드 05"/>
+          <p:cNvSpPr/>
+          <p:nvPr/>
+        </p:nvSpPr>
+        <p:spPr>
+          <a:xfrm>
+            <a:off x="9680400" y="3560000"/>
+            <a:ext cx="2176240" cy="2220000"/>
+          </a:xfrm>
+          <a:prstGeom prst="roundRect">
+            <a:avLst>
+              <a:gd name="adj" fmla="val 2600"/>
+            </a:avLst>
+          </a:prstGeom>
+          <a:solidFill>
+            <a:srgbClr val="F7F9FC"/>
+          </a:solidFill>
+          <a:ln w="9525">
+            <a:solidFill>
+              <a:srgbClr val="E4EAF2"/>
+            </a:solidFill>
+          </a:ln>
+          <a:effectLst>
+            <a:outerShdw blurRad="101600" dist="25400" dir="5400000" rotWithShape="0">
+              <a:srgbClr val="1B2A41">
+                <a:alpha val="14000"/>
+              </a:srgbClr>
+            </a:outerShdw>
+          </a:effectLst>
+        </p:spPr>
+        <p:txBody>
+          <a:bodyPr wrap="none" anchor="ctr"/>
+          <a:lstStyle/>
+          <a:p>
+            <a:pPr algn="ctr">
+              <a:buNone/>
+            </a:pPr>
+            <a:endParaRPr lang="ko-KR"/>
+          </a:p>
+        </p:txBody>
+      </p:sp>
+      <p:sp>
+        <p:nvSpPr>
+          <p:cNvPr id="1067" name="카드스트립 05"/>
+          <p:cNvSpPr/>
+          <p:nvPr/>
+        </p:nvSpPr>
+        <p:spPr>
+          <a:xfrm>
+            <a:off x="9736982" y="3560000"/>
+            <a:ext cx="2063076" cy="42000"/>
+          </a:xfrm>
+          <a:prstGeom prst="rect">
+            <a:avLst/>
+          </a:prstGeom>
+          <a:gradFill flip="none" rotWithShape="1">
+            <a:gsLst>
+              <a:gs pos="0">
+                <a:srgbClr val="2FB3D6"/>
+              </a:gs>
+              <a:gs pos="100000">
+                <a:srgbClr val="1F8AA8"/>
+              </a:gs>
+            </a:gsLst>
+            <a:lin ang="0" scaled="0"/>
+          </a:gradFill>
+          <a:ln>
+            <a:noFill/>
+          </a:ln>
+        </p:spPr>
+        <p:txBody>
+          <a:bodyPr wrap="none" anchor="ctr"/>
+          <a:lstStyle/>
+          <a:p>
+            <a:pPr algn="ctr">
+              <a:buNone/>
+            </a:pPr>
+            <a:endParaRPr lang="ko-KR"/>
+          </a:p>
+        </p:txBody>
+      </p:sp>
+      <p:sp>
+        <p:nvSpPr>
+          <p:cNvPr id="1068" name="배지 05"/>
+          <p:cNvSpPr/>
+          <p:nvPr/>
+        </p:nvSpPr>
+        <p:spPr>
+          <a:xfrm>
+            <a:off x="9810400" y="3690000"/>
+            <a:ext cx="340000" cy="340000"/>
+          </a:xfrm>
+          <a:prstGeom prst="roundRect">
+            <a:avLst>
+              <a:gd name="adj" fmla="val 28000"/>
+            </a:avLst>
+          </a:prstGeom>
+          <a:gradFill flip="none" rotWithShape="1">
+            <a:gsLst>
+              <a:gs pos="0">
+                <a:srgbClr val="2FB3D6"/>
+              </a:gs>
+              <a:gs pos="100000">
+                <a:srgbClr val="1F8AA8"/>
+              </a:gs>
+            </a:gsLst>
+            <a:lin ang="2700000" scaled="0"/>
+          </a:gradFill>
+          <a:ln>
+            <a:noFill/>
+          </a:ln>
+        </p:spPr>
+        <p:txBody>
+          <a:bodyPr wrap="square" lIns="0" tIns="0" rIns="0" bIns="0" anchor="ctr">
+            <a:noAutofit/>
+          </a:bodyPr>
+          <a:lstStyle/>
+          <a:p>
+            <a:pPr marL="0" indent="0" algn="ctr">
+              <a:buNone/>
+            </a:pPr>
+            <a:r>
+              <a:rPr lang="ko-KR" altLang="en-US" sz="1300" b="1" spc="-20" dirty="0">
+                <a:solidFill>
+                  <a:srgbClr val="FFFFFF"/>
+                </a:solidFill>
+                <a:latin typeface="맑은 고딕"/>
+                <a:ea typeface="맑은 고딕"/>
+                <a:cs typeface="Arial"/>
+              </a:rPr>
+              <a:t>05</a:t>
+            </a:r>
+          </a:p>
+        </p:txBody>
+      </p:sp>
+      <p:sp>
+        <p:nvSpPr>
+          <p:cNvPr id="1069" name="기간칩 05"/>
+          <p:cNvSpPr/>
+          <p:nvPr/>
+        </p:nvSpPr>
+        <p:spPr>
+          <a:xfrm>
+            <a:off x="10606640" y="3745000"/>
+            <a:ext cx="1120000" cy="230000"/>
+          </a:xfrm>
+          <a:prstGeom prst="roundRect">
+            <a:avLst>
+              <a:gd name="adj" fmla="val 45000"/>
+            </a:avLst>
+          </a:prstGeom>
+          <a:solidFill>
+            <a:srgbClr val="E5F6FB"/>
+          </a:solidFill>
+          <a:ln>
+            <a:noFill/>
+          </a:ln>
+        </p:spPr>
+        <p:txBody>
+          <a:bodyPr wrap="square" lIns="0" tIns="0" rIns="0" bIns="0" anchor="ctr">
+            <a:noAutofit/>
+          </a:bodyPr>
+          <a:lstStyle/>
+          <a:p>
+            <a:pPr marL="0" indent="0" algn="ctr">
+              <a:buNone/>
+            </a:pPr>
+            <a:r>
+              <a:rPr lang="ko-KR" altLang="en-US" sz="850" b="1" spc="-20" dirty="0">
+                <a:solidFill>
+                  <a:srgbClr val="1F8AA8"/>
+                </a:solidFill>
+                <a:latin typeface="맑은 고딕"/>
+                <a:ea typeface="맑은 고딕"/>
+                <a:cs typeface="Arial"/>
+              </a:rPr>
+              <a:t>10월 ~ 12월</a:t>
+            </a:r>
+          </a:p>
+        </p:txBody>
+      </p:sp>
+      <p:sp>
+        <p:nvSpPr>
+          <p:cNvPr id="1070" name="카드제목 05"/>
+          <p:cNvSpPr txBox="1"/>
+          <p:nvPr/>
+        </p:nvSpPr>
+        <p:spPr>
+          <a:xfrm>
+            <a:off x="9810400" y="4105000"/>
+            <a:ext cx="1916240" cy="500000"/>
+          </a:xfrm>
+          <a:prstGeom prst="rect">
+            <a:avLst/>
+          </a:prstGeom>
+          <a:noFill/>
+        </p:spPr>
+        <p:txBody>
+          <a:bodyPr wrap="square" lIns="0" tIns="0" rIns="0" bIns="0" anchor="t">
+            <a:noAutofit/>
+          </a:bodyPr>
+          <a:lstStyle/>
+          <a:p>
+            <a:pPr marL="0" indent="0" algn="l">
+              <a:lnSpc>
+                <a:spcPts val="1700"/>
+              </a:lnSpc>
+              <a:buNone/>
+            </a:pPr>
+            <a:r>
+              <a:rPr lang="ko-KR" altLang="en-US" sz="1300" b="1" spc="-20" dirty="0">
+                <a:solidFill>
+                  <a:srgbClr val="1B2A41"/>
+                </a:solidFill>
+                <a:latin typeface="맑은 고딕"/>
+                <a:ea typeface="맑은 고딕"/>
+                <a:cs typeface="Arial"/>
+              </a:rPr>
+              <a:t>시스템 개발 Wrap-up</a:t>
+            </a:r>
+          </a:p>
+        </p:txBody>
+      </p:sp>
+      <p:sp>
+        <p:nvSpPr>
+          <p:cNvPr id="1071" name="카드선 05"/>
+          <p:cNvSpPr/>
+          <p:nvPr/>
+        </p:nvSpPr>
+        <p:spPr>
+          <a:xfrm>
+            <a:off x="9810400" y="4650000"/>
+            <a:ext cx="1916240" cy="9525"/>
+          </a:xfrm>
+          <a:prstGeom prst="rect">
+            <a:avLst/>
+          </a:prstGeom>
+          <a:solidFill>
+            <a:srgbClr val="E3E9F0"/>
+          </a:solidFill>
+          <a:ln>
+            <a:noFill/>
+          </a:ln>
+        </p:spPr>
+        <p:txBody>
+          <a:bodyPr wrap="none" anchor="ctr"/>
+          <a:lstStyle/>
+          <a:p>
+            <a:pPr algn="ctr">
+              <a:buNone/>
+            </a:pPr>
+            <a:endParaRPr lang="ko-KR"/>
+          </a:p>
+        </p:txBody>
+      </p:sp>
+      <p:sp>
+        <p:nvSpPr>
+          <p:cNvPr id="1072" name="카드본문 05"/>
+          <p:cNvSpPr txBox="1"/>
+          <p:nvPr/>
+        </p:nvSpPr>
+        <p:spPr>
+          <a:xfrm>
+            <a:off x="9810400" y="4720000"/>
+            <a:ext cx="1916240" cy="940000"/>
+          </a:xfrm>
+          <a:prstGeom prst="rect">
+            <a:avLst/>
+          </a:prstGeom>
+          <a:noFill/>
+        </p:spPr>
+        <p:txBody>
+          <a:bodyPr wrap="square" lIns="0" tIns="0" rIns="0" bIns="0" anchor="t">
+            <a:noAutofit/>
+          </a:bodyPr>
+          <a:lstStyle/>
+          <a:p>
+            <a:pPr marL="139700" indent="-139700" algn="l">
+              <a:lnSpc>
+                <a:spcPts val="1250"/>
+              </a:lnSpc>
+              <a:buClr>
+                <a:srgbClr val="2FB3D6"/>
+              </a:buClr>
+              <a:buSzPct val="90000"/>
+              <a:buFont typeface="Arial"/>
+              <a:buChar char="▪"/>
+            </a:pPr>
+            <a:r>
+              <a:rPr lang="ko-KR" altLang="en-US" sz="1000" spc="-20" dirty="0">
+                <a:solidFill>
+                  <a:srgbClr val="44536A"/>
+                </a:solidFill>
+                <a:latin typeface="맑은 고딕"/>
+                <a:ea typeface="맑은 고딕"/>
+                <a:cs typeface="Arial"/>
+              </a:rPr>
+              <a:t>보안 · 로그인 기능 추가</a:t>
+            </a:r>
+          </a:p>
+          <a:p>
+            <a:pPr marL="139700" indent="-139700" algn="l">
+              <a:lnSpc>
+                <a:spcPts val="1250"/>
+              </a:lnSpc>
+              <a:spcBef>
+                <a:spcPts val="450"/>
+              </a:spcBef>
+              <a:buClr>
+                <a:srgbClr val="2FB3D6"/>
+              </a:buClr>
+              <a:buSzPct val="90000"/>
+              <a:buFont typeface="Arial"/>
+              <a:buChar char="▪"/>
+            </a:pPr>
+            <a:r>
+              <a:rPr lang="ko-KR" altLang="en-US" sz="1000" spc="-20" dirty="0">
+                <a:solidFill>
+                  <a:srgbClr val="44536A"/>
+                </a:solidFill>
+                <a:latin typeface="맑은 고딕"/>
+                <a:ea typeface="맑은 고딕"/>
+                <a:cs typeface="Arial"/>
+              </a:rPr>
+              <a:t>결제 시스템 연동</a:t>
+            </a:r>
+          </a:p>
+          <a:p>
+            <a:pPr marL="139700" indent="-139700" algn="l">
+              <a:lnSpc>
+                <a:spcPts val="1250"/>
+              </a:lnSpc>
+              <a:spcBef>
+                <a:spcPts val="450"/>
+              </a:spcBef>
+              <a:buClr>
+                <a:srgbClr val="2FB3D6"/>
+              </a:buClr>
+              <a:buSzPct val="90000"/>
+              <a:buFont typeface="Arial"/>
+              <a:buChar char="▪"/>
+            </a:pPr>
+            <a:r>
+              <a:rPr lang="ko-KR" altLang="en-US" sz="1000" spc="-20" dirty="0">
+                <a:solidFill>
+                  <a:srgbClr val="44536A"/>
+                </a:solidFill>
+                <a:latin typeface="맑은 고딕"/>
+                <a:ea typeface="맑은 고딕"/>
+                <a:cs typeface="Arial"/>
+              </a:rPr>
+              <a:t>시스템 런칭 예정</a:t>
+            </a:r>
+          </a:p>
+        </p:txBody>
+      </p:sp>
+      <p:sp>
+        <p:nvSpPr>
+          <p:cNvPr id="1073" name="핵심방향"/>
+          <p:cNvSpPr/>
+          <p:nvPr/>
+        </p:nvSpPr>
+        <p:spPr>
+          <a:xfrm>
+            <a:off x="426800" y="5900000"/>
+            <a:ext cx="11429840" cy="500000"/>
+          </a:xfrm>
+          <a:prstGeom prst="roundRect">
+            <a:avLst>
+              <a:gd name="adj" fmla="val 9000"/>
+            </a:avLst>
+          </a:prstGeom>
+          <a:gradFill flip="none" rotWithShape="1">
+            <a:gsLst>
+              <a:gs pos="0">
+                <a:srgbClr val="F2F6FC"/>
+              </a:gs>
+              <a:gs pos="100000">
+                <a:srgbClr val="EAF0F8"/>
+              </a:gs>
+            </a:gsLst>
+            <a:lin ang="0" scaled="0"/>
           </a:gradFill>
           <a:ln w="9525">
             <a:solidFill>
-              <a:srgbClr val="583D78"/>
+              <a:srgbClr val="DDE5F0"/>
             </a:solidFill>
           </a:ln>
         </p:spPr>
         <p:txBody>
-          <a:bodyPr lIns="179162" tIns="45720" rIns="0" bIns="45720" anchor="ctr"/>
+          <a:bodyPr wrap="none" anchor="ctr"/>
           <a:lstStyle/>
           <a:p>
             <a:pPr algn="ctr">
-              <a:lnSpc>
-                <a:spcPct val="105000"/>
-              </a:lnSpc>
-              <a:buNone/>
-            </a:pPr>
-            <a:r>
-              <a:rPr lang="ko-KR" altLang="en-US" sz="1700" b="1" dirty="0">
-                <a:solidFill>
-                  <a:srgbClr val="FFFFFF"/>
-                </a:solidFill>
-                <a:latin typeface="현대하모니 L" panose="02020603020101020101" pitchFamily="18" charset="-127"/>
-                <a:ea typeface="현대하모니 L" panose="02020603020101020101" pitchFamily="18" charset="-127"/>
-                <a:cs typeface="Arial" pitchFamily="34" charset="0"/>
-              </a:rPr>
-              <a:t>KOM &amp;</a:t>
-            </a:r>
-            <a:br>
-              <a:rPr lang="ko-KR"/>
-            </a:br>
-            <a:r>
-              <a:rPr lang="ko-KR" altLang="en-US" sz="1700" b="1" dirty="0">
-                <a:solidFill>
-                  <a:srgbClr val="FFFFFF"/>
-                </a:solidFill>
-                <a:latin typeface="현대하모니 L" panose="02020603020101020101" pitchFamily="18" charset="-127"/>
-                <a:ea typeface="현대하모니 L" panose="02020603020101020101" pitchFamily="18" charset="-127"/>
-                <a:cs typeface="Arial" pitchFamily="34" charset="0"/>
-              </a:rPr>
-              <a:t>방향성 검토</a:t>
-            </a:r>
-          </a:p>
-        </p:txBody>
-      </p:sp>
-      <p:sp>
-        <p:nvSpPr>
-          <p:cNvPr id="101" name="공정 셰브런 2"/>
+              <a:buNone/>
+            </a:pPr>
+            <a:endParaRPr lang="ko-KR"/>
+          </a:p>
+        </p:txBody>
+      </p:sp>
+      <p:sp>
+        <p:nvSpPr>
+          <p:cNvPr id="1074" name="핵심방향 액센트"/>
           <p:cNvSpPr/>
           <p:nvPr/>
         </p:nvSpPr>
         <p:spPr>
           <a:xfrm>
-            <a:off x="2105158" y="1135490"/>
-            <a:ext cx="2839724" cy="1194067"/>
-          </a:xfrm>
-          <a:prstGeom prst="chevron">
+            <a:off x="526800" y="6010000"/>
+            <a:ext cx="48000" cy="280000"/>
+          </a:xfrm>
+          <a:prstGeom prst="roundRect">
             <a:avLst>
               <a:gd name="adj" fmla="val 50000"/>
             </a:avLst>
           </a:prstGeom>
-          <a:gradFill flip="none" rotWithShape="1">
-            <a:gsLst>
-              <a:gs pos="0">
-                <a:srgbClr val="5D4EB5"/>
-              </a:gs>
-              <a:gs pos="12000">
-                <a:srgbClr val="6353BB"/>
-              </a:gs>
-              <a:gs pos="100000">
-                <a:srgbClr val="413781"/>
-              </a:gs>
-            </a:gsLst>
-            <a:lin ang="5400000" scaled="0"/>
-          </a:gradFill>
-          <a:ln w="9525">
-            <a:solidFill>
-              <a:srgbClr val="413781"/>
-            </a:solidFill>
+          <a:solidFill>
+            <a:srgbClr val="014099"/>
+          </a:solidFill>
+          <a:ln>
+            <a:noFill/>
           </a:ln>
         </p:spPr>
         <p:txBody>
-          <a:bodyPr lIns="0" tIns="45720" rIns="0" bIns="45720" anchor="ctr"/>
+          <a:bodyPr wrap="none" anchor="ctr"/>
           <a:lstStyle/>
           <a:p>
             <a:pPr algn="ctr">
-              <a:lnSpc>
-                <a:spcPct val="105000"/>
-              </a:lnSpc>
-              <a:buNone/>
-            </a:pPr>
-            <a:r>
-              <a:rPr lang="ko-KR" altLang="en-US" sz="1700" b="1" dirty="0">
-                <a:solidFill>
-                  <a:srgbClr val="FFFFFF"/>
-                </a:solidFill>
-                <a:latin typeface="현대하모니 L" panose="02020603020101020101" pitchFamily="18" charset="-127"/>
-                <a:ea typeface="현대하모니 L" panose="02020603020101020101" pitchFamily="18" charset="-127"/>
-                <a:cs typeface="Arial" pitchFamily="34" charset="0"/>
-              </a:rPr>
-              <a:t>L&amp;L System</a:t>
-            </a:r>
-            <a:br>
-              <a:rPr lang="ko-KR"/>
-            </a:br>
-            <a:r>
-              <a:rPr lang="ko-KR" altLang="en-US" sz="1700" b="1" dirty="0">
-                <a:solidFill>
-                  <a:srgbClr val="FFFFFF"/>
-                </a:solidFill>
-                <a:latin typeface="현대하모니 L" panose="02020603020101020101" pitchFamily="18" charset="-127"/>
-                <a:ea typeface="현대하모니 L" panose="02020603020101020101" pitchFamily="18" charset="-127"/>
-                <a:cs typeface="Arial" pitchFamily="34" charset="0"/>
-              </a:rPr>
-              <a:t>Mgmt</a:t>
-            </a:r>
-          </a:p>
-        </p:txBody>
-      </p:sp>
-      <p:sp>
-        <p:nvSpPr>
-          <p:cNvPr id="102" name="공정 셰브런 3"/>
-          <p:cNvSpPr/>
-          <p:nvPr/>
-        </p:nvSpPr>
-        <p:spPr>
-          <a:xfrm>
-            <a:off x="4353646" y="1135490"/>
-            <a:ext cx="2830766" cy="1194067"/>
-          </a:xfrm>
-          <a:prstGeom prst="chevron">
-            <a:avLst>
-              <a:gd name="adj" fmla="val 50000"/>
-            </a:avLst>
-          </a:prstGeom>
-          <a:gradFill flip="none" rotWithShape="1">
-            <a:gsLst>
-              <a:gs pos="0">
-                <a:srgbClr val="465AC0"/>
-              </a:gs>
-              <a:gs pos="12000">
-                <a:srgbClr val="4B60C6"/>
-              </a:gs>
-              <a:gs pos="100000">
-                <a:srgbClr val="313F88"/>
-              </a:gs>
-            </a:gsLst>
-            <a:lin ang="5400000" scaled="0"/>
-          </a:gradFill>
-          <a:ln w="9525">
-            <a:solidFill>
-              <a:srgbClr val="313F88"/>
-            </a:solidFill>
-          </a:ln>
-        </p:spPr>
-        <p:txBody>
-          <a:bodyPr lIns="0" tIns="45720" rIns="0" bIns="45720" anchor="ctr"/>
-          <a:lstStyle/>
-          <a:p>
-            <a:pPr algn="ctr">
-              <a:lnSpc>
-                <a:spcPct val="105000"/>
-              </a:lnSpc>
-              <a:buNone/>
-            </a:pPr>
-            <a:r>
-              <a:rPr lang="ko-KR" altLang="en-US" sz="1700" b="1" dirty="0">
-                <a:solidFill>
-                  <a:srgbClr val="FFFFFF"/>
-                </a:solidFill>
-                <a:latin typeface="현대하모니 L" panose="02020603020101020101" pitchFamily="18" charset="-127"/>
-                <a:ea typeface="현대하모니 L" panose="02020603020101020101" pitchFamily="18" charset="-127"/>
-                <a:cs typeface="Arial" pitchFamily="34" charset="0"/>
-              </a:rPr>
-              <a:t>Trend Mgmt</a:t>
-            </a:r>
-          </a:p>
-        </p:txBody>
-      </p:sp>
-      <p:sp>
-        <p:nvSpPr>
-          <p:cNvPr id="103" name="공정 셰브런 4"/>
-          <p:cNvSpPr/>
-          <p:nvPr/>
-        </p:nvSpPr>
-        <p:spPr>
-          <a:xfrm>
-            <a:off x="6593176" y="1135490"/>
-            <a:ext cx="2839724" cy="1194067"/>
-          </a:xfrm>
-          <a:prstGeom prst="chevron">
-            <a:avLst>
-              <a:gd name="adj" fmla="val 50000"/>
-            </a:avLst>
-          </a:prstGeom>
-          <a:gradFill flip="none" rotWithShape="1">
-            <a:gsLst>
-              <a:gs pos="0">
-                <a:srgbClr val="3D82CD"/>
-              </a:gs>
-              <a:gs pos="12000">
-                <a:srgbClr val="4287D2"/>
-              </a:gs>
-              <a:gs pos="100000">
-                <a:srgbClr val="2B5B91"/>
-              </a:gs>
-            </a:gsLst>
-            <a:lin ang="5400000" scaled="0"/>
-          </a:gradFill>
-          <a:ln w="9525">
-            <a:solidFill>
-              <a:srgbClr val="2B5B91"/>
-            </a:solidFill>
-          </a:ln>
-        </p:spPr>
-        <p:txBody>
-          <a:bodyPr lIns="0" tIns="45720" rIns="0" bIns="45720" anchor="ctr"/>
-          <a:lstStyle/>
-          <a:p>
-            <a:pPr algn="ctr">
-              <a:lnSpc>
-                <a:spcPct val="105000"/>
-              </a:lnSpc>
-              <a:buNone/>
-            </a:pPr>
-            <a:r>
-              <a:rPr lang="ko-KR" altLang="en-US" sz="1700" b="1" dirty="0">
-                <a:solidFill>
-                  <a:srgbClr val="FFFFFF"/>
-                </a:solidFill>
-                <a:latin typeface="현대하모니 L" panose="02020603020101020101" pitchFamily="18" charset="-127"/>
-                <a:ea typeface="현대하모니 L" panose="02020603020101020101" pitchFamily="18" charset="-127"/>
-                <a:cs typeface="Arial" pitchFamily="34" charset="0"/>
-              </a:rPr>
-              <a:t>Risk Mgmt</a:t>
-            </a:r>
-          </a:p>
-        </p:txBody>
-      </p:sp>
-      <p:sp>
-        <p:nvSpPr>
-          <p:cNvPr id="104" name="공정 셰브런 5"/>
-          <p:cNvSpPr/>
-          <p:nvPr/>
-        </p:nvSpPr>
-        <p:spPr>
-          <a:xfrm>
-            <a:off x="8841663" y="1135490"/>
-            <a:ext cx="2454525" cy="1194067"/>
-          </a:xfrm>
-          <a:prstGeom prst="chevron">
-            <a:avLst>
-              <a:gd name="adj" fmla="val 50000"/>
-            </a:avLst>
-          </a:prstGeom>
-          <a:gradFill flip="none" rotWithShape="1">
-            <a:gsLst>
-              <a:gs pos="0">
-                <a:srgbClr val="35B5D8"/>
-              </a:gs>
-              <a:gs pos="12000">
-                <a:srgbClr val="39BBDD"/>
-              </a:gs>
-              <a:gs pos="100000">
-                <a:srgbClr val="258198"/>
-              </a:gs>
-            </a:gsLst>
-            <a:lin ang="5400000" scaled="0"/>
-          </a:gradFill>
-          <a:ln w="9525">
-            <a:solidFill>
-              <a:srgbClr val="258198"/>
-            </a:solidFill>
-          </a:ln>
-        </p:spPr>
-        <p:txBody>
-          <a:bodyPr lIns="0" tIns="45720" rIns="0" bIns="45720" anchor="ctr"/>
-          <a:lstStyle/>
-          <a:p>
-            <a:pPr algn="ctr">
-              <a:lnSpc>
-                <a:spcPct val="105000"/>
-              </a:lnSpc>
-              <a:buNone/>
-            </a:pPr>
-            <a:r>
-              <a:rPr lang="ko-KR" altLang="en-US" sz="1700" b="1" dirty="0">
-                <a:solidFill>
-                  <a:srgbClr val="FFFFFF"/>
-                </a:solidFill>
-                <a:latin typeface="현대하모니 L" panose="02020603020101020101" pitchFamily="18" charset="-127"/>
-                <a:ea typeface="현대하모니 L" panose="02020603020101020101" pitchFamily="18" charset="-127"/>
-                <a:cs typeface="Arial" pitchFamily="34" charset="0"/>
-              </a:rPr>
-              <a:t>시스템 개발</a:t>
-            </a:r>
-            <a:br>
-              <a:rPr lang="ko-KR"/>
-            </a:br>
-            <a:r>
-              <a:rPr lang="ko-KR" altLang="en-US" sz="1700" b="1" dirty="0">
-                <a:solidFill>
-                  <a:srgbClr val="FFFFFF"/>
-                </a:solidFill>
-                <a:latin typeface="현대하모니 L" panose="02020603020101020101" pitchFamily="18" charset="-127"/>
-                <a:ea typeface="현대하모니 L" panose="02020603020101020101" pitchFamily="18" charset="-127"/>
-                <a:cs typeface="Arial" pitchFamily="34" charset="0"/>
-              </a:rPr>
-              <a:t>Wrap-up</a:t>
-            </a:r>
-          </a:p>
-        </p:txBody>
-      </p:sp>
-      <p:sp>
-        <p:nvSpPr>
-          <p:cNvPr id="200" name="단계별 세부내용"/>
+              <a:buNone/>
+            </a:pPr>
+            <a:endParaRPr lang="ko-KR"/>
+          </a:p>
+        </p:txBody>
+      </p:sp>
+      <p:sp>
+        <p:nvSpPr>
+          <p:cNvPr id="1075" name="핵심방향 문구"/>
           <p:cNvSpPr txBox="1"/>
           <p:nvPr/>
         </p:nvSpPr>
         <p:spPr>
           <a:xfrm>
-            <a:off x="335360" y="2420000"/>
-            <a:ext cx="11521280" cy="4033188"/>
+            <a:off x="666800" y="5900000"/>
+            <a:ext cx="11029840" cy="500000"/>
           </a:xfrm>
           <a:prstGeom prst="rect">
             <a:avLst/>
@@ -3883,330 +6796,38 @@
           <a:noFill/>
         </p:spPr>
         <p:txBody>
-          <a:bodyPr wrap="square" lIns="91440" tIns="0" rIns="91440" bIns="0">
-            <a:normAutofit/>
+          <a:bodyPr wrap="square" lIns="0" tIns="0" rIns="0" bIns="0" anchor="ctr">
+            <a:noAutofit/>
           </a:bodyPr>
           <a:lstStyle/>
           <a:p>
-            <a:pPr marL="541338" indent="-254000">
+            <a:pPr marL="0" indent="0" algn="l">
               <a:lnSpc>
-                <a:spcPts val="2160"/>
+                <a:spcPts val="1500"/>
               </a:lnSpc>
-              <a:spcBef>
-                <a:spcPts val="0"/>
-              </a:spcBef>
-              <a:buFont typeface="Wingdings" panose="05000000000000000000" pitchFamily="2" charset="2"/>
-              <a:buChar char="l"/>
-            </a:pPr>
-            <a:r>
-              <a:rPr lang="ko-KR" altLang="en-US" sz="1400" b="1" spc="-30" dirty="0">
-                <a:solidFill>
-                  <a:schemeClr val="tx1"/>
-                </a:solidFill>
-                <a:latin typeface="현대하모니 L" panose="02020603020101020101" pitchFamily="18" charset="-127"/>
-                <a:ea typeface="현대하모니 L" panose="02020603020101020101" pitchFamily="18" charset="-127"/>
-                <a:cs typeface="Arial" pitchFamily="34" charset="0"/>
+              <a:buNone/>
+            </a:pPr>
+            <a:r>
+              <a:rPr lang="ko-KR" altLang="en-US" sz="1100" b="1" spc="-20" dirty="0">
+                <a:solidFill>
+                  <a:srgbClr val="014099"/>
+                </a:solidFill>
+                <a:latin typeface="맑은 고딕"/>
+                <a:ea typeface="맑은 고딕"/>
+                <a:cs typeface="Arial"/>
               </a:rPr>
-              <a:t>1단계 (~3월 중순) : KOM &amp; 방향성 검토</a:t>
-            </a:r>
-          </a:p>
-          <a:p>
-            <a:pPr marL="896938" indent="-134938">
-              <a:lnSpc>
-                <a:spcPts val="1750"/>
-              </a:lnSpc>
-              <a:spcBef>
-                <a:spcPts val="200"/>
-              </a:spcBef>
-              <a:buFont typeface="현대하모니 L" panose="02020603020101020101" pitchFamily="18" charset="-127"/>
-              <a:buChar char="-"/>
-            </a:pPr>
-            <a:r>
-              <a:rPr lang="ko-KR" altLang="en-US" sz="1300" spc="-30" dirty="0">
-                <a:solidFill>
-                  <a:schemeClr val="tx1"/>
-                </a:solidFill>
-                <a:latin typeface="현대하모니 L" panose="02020603020101020101" pitchFamily="18" charset="-127"/>
-                <a:ea typeface="현대하모니 L" panose="02020603020101020101" pitchFamily="18" charset="-127"/>
-                <a:cs typeface="Arial" pitchFamily="34" charset="0"/>
+              <a:t>핵심 방향     </a:t>
+            </a:r>
+            <a:r>
+              <a:rPr lang="ko-KR" altLang="en-US" sz="1050" spc="-20" dirty="0">
+                <a:solidFill>
+                  <a:srgbClr val="1B2A41"/>
+                </a:solidFill>
+                <a:latin typeface="맑은 고딕"/>
+                <a:ea typeface="맑은 고딕"/>
+                <a:cs typeface="Arial"/>
               </a:rPr>
-              <a:t>TFT 결성, 현업 사용 시스템 및 Stage/공종별 업무 파악</a:t>
-            </a:r>
-          </a:p>
-          <a:p>
-            <a:pPr marL="896938" indent="-134938">
-              <a:lnSpc>
-                <a:spcPts val="1750"/>
-              </a:lnSpc>
-              <a:spcBef>
-                <a:spcPts val="200"/>
-              </a:spcBef>
-              <a:buFont typeface="현대하모니 L" panose="02020603020101020101" pitchFamily="18" charset="-127"/>
-              <a:buChar char="-"/>
-            </a:pPr>
-            <a:r>
-              <a:rPr lang="ko-KR" altLang="en-US" sz="1300" spc="-30" dirty="0">
-                <a:solidFill>
-                  <a:schemeClr val="tx1"/>
-                </a:solidFill>
-                <a:latin typeface="현대하모니 L" panose="02020603020101020101" pitchFamily="18" charset="-127"/>
-                <a:ea typeface="현대하모니 L" panose="02020603020101020101" pitchFamily="18" charset="-127"/>
-                <a:cs typeface="Arial" pitchFamily="34" charset="0"/>
-              </a:rPr>
-              <a:t>개발 방향성 : 현업이 실제 쓰고 있는 체계를 중심으로 개발하고, 여기에 리스크 관리 관점을 접목</a:t>
-            </a:r>
-          </a:p>
-          <a:p>
-            <a:pPr marL="896938" indent="-134938">
-              <a:lnSpc>
-                <a:spcPts val="1750"/>
-              </a:lnSpc>
-              <a:spcBef>
-                <a:spcPts val="200"/>
-              </a:spcBef>
-              <a:buFont typeface="현대하모니 L" panose="02020603020101020101" pitchFamily="18" charset="-127"/>
-              <a:buChar char="-"/>
-            </a:pPr>
-            <a:r>
-              <a:rPr lang="ko-KR" altLang="en-US" sz="1300" spc="-30" dirty="0">
-                <a:solidFill>
-                  <a:schemeClr val="tx1"/>
-                </a:solidFill>
-                <a:latin typeface="현대하모니 L" panose="02020603020101020101" pitchFamily="18" charset="-127"/>
-                <a:ea typeface="현대하모니 L" panose="02020603020101020101" pitchFamily="18" charset="-127"/>
-                <a:cs typeface="Arial" pitchFamily="34" charset="0"/>
-              </a:rPr>
-              <a:t>L&amp;L(착수 전 사례 검토)과 Trend Mgmt(입찰 대비 변경사항 기록·관리) 2개 시스템 필요성 도출</a:t>
-            </a:r>
-          </a:p>
-          <a:p>
-            <a:pPr marL="541338" indent="-254000">
-              <a:lnSpc>
-                <a:spcPts val="2160"/>
-              </a:lnSpc>
-              <a:spcBef>
-                <a:spcPts val="600"/>
-              </a:spcBef>
-              <a:buFont typeface="Wingdings" panose="05000000000000000000" pitchFamily="2" charset="2"/>
-              <a:buChar char="l"/>
-            </a:pPr>
-            <a:r>
-              <a:rPr lang="ko-KR" altLang="en-US" sz="1400" b="1" spc="-30" dirty="0">
-                <a:solidFill>
-                  <a:schemeClr val="tx1"/>
-                </a:solidFill>
-                <a:latin typeface="현대하모니 L" panose="02020603020101020101" pitchFamily="18" charset="-127"/>
-                <a:ea typeface="현대하모니 L" panose="02020603020101020101" pitchFamily="18" charset="-127"/>
-                <a:cs typeface="Arial" pitchFamily="34" charset="0"/>
-              </a:rPr>
-              <a:t>2단계 (3월 중순 ~ 4월 중순) : L&amp;L System Mgmt</a:t>
-            </a:r>
-          </a:p>
-          <a:p>
-            <a:pPr marL="896938" indent="-134938">
-              <a:lnSpc>
-                <a:spcPts val="1750"/>
-              </a:lnSpc>
-              <a:spcBef>
-                <a:spcPts val="200"/>
-              </a:spcBef>
-              <a:buFont typeface="현대하모니 L" panose="02020603020101020101" pitchFamily="18" charset="-127"/>
-              <a:buChar char="-"/>
-            </a:pPr>
-            <a:r>
-              <a:rPr lang="ko-KR" altLang="en-US" sz="1300" spc="-30" dirty="0">
-                <a:solidFill>
-                  <a:schemeClr val="tx1"/>
-                </a:solidFill>
-                <a:latin typeface="현대하모니 L" panose="02020603020101020101" pitchFamily="18" charset="-127"/>
-                <a:ea typeface="현대하모니 L" panose="02020603020101020101" pitchFamily="18" charset="-127"/>
-                <a:cs typeface="Arial" pitchFamily="34" charset="0"/>
-              </a:rPr>
-              <a:t>기존 HMAP 관리시스템을 기반으로 사례를 축적·활용하는 L&amp;L 운영 시스템 개발</a:t>
-            </a:r>
-          </a:p>
-          <a:p>
-            <a:pPr marL="896938" indent="-134938">
-              <a:lnSpc>
-                <a:spcPts val="1750"/>
-              </a:lnSpc>
-              <a:spcBef>
-                <a:spcPts val="200"/>
-              </a:spcBef>
-              <a:buFont typeface="현대하모니 L" panose="02020603020101020101" pitchFamily="18" charset="-127"/>
-              <a:buChar char="-"/>
-            </a:pPr>
-            <a:r>
-              <a:rPr lang="ko-KR" altLang="en-US" sz="1300" spc="-30" dirty="0">
-                <a:solidFill>
-                  <a:schemeClr val="tx1"/>
-                </a:solidFill>
-                <a:latin typeface="현대하모니 L" panose="02020603020101020101" pitchFamily="18" charset="-127"/>
-                <a:ea typeface="현대하모니 L" panose="02020603020101020101" pitchFamily="18" charset="-127"/>
-                <a:cs typeface="Arial" pitchFamily="34" charset="0"/>
-              </a:rPr>
-              <a:t>즉시 반영이 어렵거나 장기·중요 사안은 Trend Mgmt로 이관하여 관리하는 체계 구축</a:t>
-            </a:r>
-          </a:p>
-          <a:p>
-            <a:pPr marL="541338" indent="-254000">
-              <a:lnSpc>
-                <a:spcPts val="2160"/>
-              </a:lnSpc>
-              <a:spcBef>
-                <a:spcPts val="600"/>
-              </a:spcBef>
-              <a:buFont typeface="Wingdings" panose="05000000000000000000" pitchFamily="2" charset="2"/>
-              <a:buChar char="l"/>
-            </a:pPr>
-            <a:r>
-              <a:rPr lang="ko-KR" altLang="en-US" sz="1400" b="1" spc="-30" dirty="0">
-                <a:solidFill>
-                  <a:schemeClr val="tx1"/>
-                </a:solidFill>
-                <a:latin typeface="현대하모니 L" panose="02020603020101020101" pitchFamily="18" charset="-127"/>
-                <a:ea typeface="현대하모니 L" panose="02020603020101020101" pitchFamily="18" charset="-127"/>
-                <a:cs typeface="Arial" pitchFamily="34" charset="0"/>
-              </a:rPr>
-              <a:t>3단계 (4월 중순 ~ 5월 중순) : Trend Mgmt</a:t>
-            </a:r>
-          </a:p>
-          <a:p>
-            <a:pPr marL="896938" indent="-134938">
-              <a:lnSpc>
-                <a:spcPts val="1750"/>
-              </a:lnSpc>
-              <a:spcBef>
-                <a:spcPts val="200"/>
-              </a:spcBef>
-              <a:buFont typeface="현대하모니 L" panose="02020603020101020101" pitchFamily="18" charset="-127"/>
-              <a:buChar char="-"/>
-            </a:pPr>
-            <a:r>
-              <a:rPr lang="ko-KR" altLang="en-US" sz="1300" spc="-30" dirty="0">
-                <a:solidFill>
-                  <a:schemeClr val="tx1"/>
-                </a:solidFill>
-                <a:latin typeface="현대하모니 L" panose="02020603020101020101" pitchFamily="18" charset="-127"/>
-                <a:ea typeface="현대하모니 L" panose="02020603020101020101" pitchFamily="18" charset="-127"/>
-                <a:cs typeface="Arial" pitchFamily="34" charset="0"/>
-              </a:rPr>
-              <a:t>운영 중인 SAT4 · CSSP 자료를 연계하여 Trend Management 시스템 개발</a:t>
-            </a:r>
-          </a:p>
-          <a:p>
-            <a:pPr marL="896938" indent="-134938">
-              <a:lnSpc>
-                <a:spcPts val="1750"/>
-              </a:lnSpc>
-              <a:spcBef>
-                <a:spcPts val="200"/>
-              </a:spcBef>
-              <a:buFont typeface="현대하모니 L" panose="02020603020101020101" pitchFamily="18" charset="-127"/>
-              <a:buChar char="-"/>
-            </a:pPr>
-            <a:r>
-              <a:rPr lang="ko-KR" altLang="en-US" sz="1300" spc="-30" dirty="0">
-                <a:solidFill>
-                  <a:schemeClr val="tx1"/>
-                </a:solidFill>
-                <a:latin typeface="현대하모니 L" panose="02020603020101020101" pitchFamily="18" charset="-127"/>
-                <a:ea typeface="현대하모니 L" panose="02020603020101020101" pitchFamily="18" charset="-127"/>
-                <a:cs typeface="Arial" pitchFamily="34" charset="0"/>
-              </a:rPr>
-              <a:t>Log → Master → Trend 3단계 분류 체계 적용 (Log 최하위, Trend 최상위)</a:t>
-            </a:r>
-          </a:p>
-          <a:p>
-            <a:pPr marL="541338" indent="-254000">
-              <a:lnSpc>
-                <a:spcPts val="2160"/>
-              </a:lnSpc>
-              <a:spcBef>
-                <a:spcPts val="600"/>
-              </a:spcBef>
-              <a:buFont typeface="Wingdings" panose="05000000000000000000" pitchFamily="2" charset="2"/>
-              <a:buChar char="l"/>
-            </a:pPr>
-            <a:r>
-              <a:rPr lang="ko-KR" altLang="en-US" sz="1400" b="1" spc="-30" dirty="0">
-                <a:solidFill>
-                  <a:schemeClr val="tx1"/>
-                </a:solidFill>
-                <a:latin typeface="현대하모니 L" panose="02020603020101020101" pitchFamily="18" charset="-127"/>
-                <a:ea typeface="현대하모니 L" panose="02020603020101020101" pitchFamily="18" charset="-127"/>
-                <a:cs typeface="Arial" pitchFamily="34" charset="0"/>
-              </a:rPr>
-              <a:t>4단계 (5월 중순 ~ 6월, 9월) : Risk Mgmt</a:t>
-            </a:r>
-          </a:p>
-          <a:p>
-            <a:pPr marL="896938" indent="-134938">
-              <a:lnSpc>
-                <a:spcPts val="1750"/>
-              </a:lnSpc>
-              <a:spcBef>
-                <a:spcPts val="200"/>
-              </a:spcBef>
-              <a:buFont typeface="현대하모니 L" panose="02020603020101020101" pitchFamily="18" charset="-127"/>
-              <a:buChar char="-"/>
-            </a:pPr>
-            <a:r>
-              <a:rPr lang="ko-KR" altLang="en-US" sz="1300" spc="-30" dirty="0">
-                <a:solidFill>
-                  <a:schemeClr val="tx1"/>
-                </a:solidFill>
-                <a:latin typeface="현대하모니 L" panose="02020603020101020101" pitchFamily="18" charset="-127"/>
-                <a:ea typeface="현대하모니 L" panose="02020603020101020101" pitchFamily="18" charset="-127"/>
-                <a:cs typeface="Arial" pitchFamily="34" charset="0"/>
-              </a:rPr>
-              <a:t>L&amp;L 및 Trend Management 시스템에 리스크(Risk) 관리 개념 도입</a:t>
-            </a:r>
-          </a:p>
-          <a:p>
-            <a:pPr marL="541338" indent="-254000">
-              <a:lnSpc>
-                <a:spcPts val="2160"/>
-              </a:lnSpc>
-              <a:spcBef>
-                <a:spcPts val="600"/>
-              </a:spcBef>
-              <a:buFont typeface="Wingdings" panose="05000000000000000000" pitchFamily="2" charset="2"/>
-              <a:buChar char="l"/>
-            </a:pPr>
-            <a:r>
-              <a:rPr lang="ko-KR" altLang="en-US" sz="1400" b="1" spc="-30" dirty="0">
-                <a:solidFill>
-                  <a:schemeClr val="tx1"/>
-                </a:solidFill>
-                <a:latin typeface="현대하모니 L" panose="02020603020101020101" pitchFamily="18" charset="-127"/>
-                <a:ea typeface="현대하모니 L" panose="02020603020101020101" pitchFamily="18" charset="-127"/>
-                <a:cs typeface="Arial" pitchFamily="34" charset="0"/>
-              </a:rPr>
-              <a:t>5단계 (10월 ~ 12월) : 시스템 개발 Wrap-up</a:t>
-            </a:r>
-          </a:p>
-          <a:p>
-            <a:pPr marL="896938" indent="-134938">
-              <a:lnSpc>
-                <a:spcPts val="1750"/>
-              </a:lnSpc>
-              <a:spcBef>
-                <a:spcPts val="200"/>
-              </a:spcBef>
-              <a:buFont typeface="현대하모니 L" panose="02020603020101020101" pitchFamily="18" charset="-127"/>
-              <a:buChar char="-"/>
-            </a:pPr>
-            <a:r>
-              <a:rPr lang="ko-KR" altLang="en-US" sz="1300" spc="-30" dirty="0">
-                <a:solidFill>
-                  <a:schemeClr val="tx1"/>
-                </a:solidFill>
-                <a:latin typeface="현대하모니 L" panose="02020603020101020101" pitchFamily="18" charset="-127"/>
-                <a:ea typeface="현대하모니 L" panose="02020603020101020101" pitchFamily="18" charset="-127"/>
-                <a:cs typeface="Arial" pitchFamily="34" charset="0"/>
-              </a:rPr>
-              <a:t>보안 · 로그인 · 결제 시스템을 추가하여 런칭 예정</a:t>
+              <a:t>현업이 실제 사용하는 체계(L&amp;L · Trend Management)를 기반으로 개발하고, 여기에 리스크 관리 관점을 접목 → 보안 · 결제까지 갖춘 통합 시스템으로 런칭</a:t>
             </a:r>
           </a:p>
         </p:txBody>

--- a/output/Introduction_개발일정.pptx
+++ b/output/Introduction_개발일정.pptx
@@ -3994,7 +3994,7 @@
         <p:spPr>
           <a:xfrm>
             <a:off x="2956800" y="1510000"/>
-            <a:ext cx="9525" cy="1860000"/>
+            <a:ext cx="9525" cy="2035000"/>
           </a:xfrm>
           <a:prstGeom prst="rect">
             <a:avLst/>
@@ -4026,7 +4026,7 @@
         <p:spPr>
           <a:xfrm>
             <a:off x="3846784" y="1510000"/>
-            <a:ext cx="9525" cy="1860000"/>
+            <a:ext cx="9525" cy="2035000"/>
           </a:xfrm>
           <a:prstGeom prst="rect">
             <a:avLst/>
@@ -4058,7 +4058,7 @@
         <p:spPr>
           <a:xfrm>
             <a:off x="4736768" y="1510000"/>
-            <a:ext cx="9525" cy="1860000"/>
+            <a:ext cx="9525" cy="2035000"/>
           </a:xfrm>
           <a:prstGeom prst="rect">
             <a:avLst/>
@@ -4090,7 +4090,7 @@
         <p:spPr>
           <a:xfrm>
             <a:off x="5626752" y="1510000"/>
-            <a:ext cx="9525" cy="1860000"/>
+            <a:ext cx="9525" cy="2035000"/>
           </a:xfrm>
           <a:prstGeom prst="rect">
             <a:avLst/>
@@ -4122,7 +4122,7 @@
         <p:spPr>
           <a:xfrm>
             <a:off x="6516736" y="1510000"/>
-            <a:ext cx="9525" cy="1860000"/>
+            <a:ext cx="9525" cy="2035000"/>
           </a:xfrm>
           <a:prstGeom prst="rect">
             <a:avLst/>
@@ -4154,7 +4154,7 @@
         <p:spPr>
           <a:xfrm>
             <a:off x="7406720" y="1510000"/>
-            <a:ext cx="9525" cy="1860000"/>
+            <a:ext cx="9525" cy="2035000"/>
           </a:xfrm>
           <a:prstGeom prst="rect">
             <a:avLst/>
@@ -4186,7 +4186,7 @@
         <p:spPr>
           <a:xfrm>
             <a:off x="8296704" y="1510000"/>
-            <a:ext cx="9525" cy="1860000"/>
+            <a:ext cx="9525" cy="2035000"/>
           </a:xfrm>
           <a:prstGeom prst="rect">
             <a:avLst/>
@@ -4218,7 +4218,7 @@
         <p:spPr>
           <a:xfrm>
             <a:off x="9186688" y="1510000"/>
-            <a:ext cx="9525" cy="1860000"/>
+            <a:ext cx="9525" cy="2035000"/>
           </a:xfrm>
           <a:prstGeom prst="rect">
             <a:avLst/>
@@ -4250,7 +4250,7 @@
         <p:spPr>
           <a:xfrm>
             <a:off x="10076672" y="1510000"/>
-            <a:ext cx="9525" cy="1860000"/>
+            <a:ext cx="9525" cy="2035000"/>
           </a:xfrm>
           <a:prstGeom prst="rect">
             <a:avLst/>
@@ -4282,7 +4282,7 @@
         <p:spPr>
           <a:xfrm>
             <a:off x="10966656" y="1510000"/>
-            <a:ext cx="9525" cy="1860000"/>
+            <a:ext cx="9525" cy="2035000"/>
           </a:xfrm>
           <a:prstGeom prst="rect">
             <a:avLst/>
@@ -4314,7 +4314,7 @@
         <p:spPr>
           <a:xfrm>
             <a:off x="11856640" y="1510000"/>
-            <a:ext cx="9525" cy="1860000"/>
+            <a:ext cx="9525" cy="2035000"/>
           </a:xfrm>
           <a:prstGeom prst="rect">
             <a:avLst/>
@@ -4346,7 +4346,7 @@
         <p:spPr>
           <a:xfrm>
             <a:off x="426800" y="1570000"/>
-            <a:ext cx="2350000" cy="360000"/>
+            <a:ext cx="2350000" cy="395000"/>
           </a:xfrm>
           <a:prstGeom prst="rect">
             <a:avLst/>
@@ -4395,7 +4395,7 @@
         </p:nvSpPr>
         <p:spPr>
           <a:xfrm>
-            <a:off x="2956800" y="1657500"/>
+            <a:off x="2956800" y="1675000"/>
             <a:ext cx="489491" cy="185000"/>
           </a:xfrm>
           <a:prstGeom prst="roundRect">
@@ -4437,8 +4437,8 @@
         </p:nvSpPr>
         <p:spPr>
           <a:xfrm>
-            <a:off x="426800" y="1930000"/>
-            <a:ext cx="11429840" cy="360000"/>
+            <a:off x="426800" y="1965000"/>
+            <a:ext cx="11429840" cy="395000"/>
           </a:xfrm>
           <a:prstGeom prst="rect">
             <a:avLst/>
@@ -4469,8 +4469,8 @@
         </p:nvSpPr>
         <p:spPr>
           <a:xfrm>
-            <a:off x="426800" y="1930000"/>
-            <a:ext cx="2350000" cy="360000"/>
+            <a:off x="426800" y="1965000"/>
+            <a:ext cx="2350000" cy="395000"/>
           </a:xfrm>
           <a:prstGeom prst="rect">
             <a:avLst/>
@@ -4519,7 +4519,7 @@
         </p:nvSpPr>
         <p:spPr>
           <a:xfrm>
-            <a:off x="3446291" y="2017500"/>
+            <a:off x="3446291" y="2070000"/>
             <a:ext cx="845484" cy="185000"/>
           </a:xfrm>
           <a:prstGeom prst="roundRect">
@@ -4561,8 +4561,8 @@
         </p:nvSpPr>
         <p:spPr>
           <a:xfrm>
-            <a:off x="426800" y="2290000"/>
-            <a:ext cx="2350000" cy="360000"/>
+            <a:off x="426800" y="2360000"/>
+            <a:ext cx="2350000" cy="395000"/>
           </a:xfrm>
           <a:prstGeom prst="rect">
             <a:avLst/>
@@ -4611,7 +4611,7 @@
         </p:nvSpPr>
         <p:spPr>
           <a:xfrm>
-            <a:off x="4291776" y="2377500"/>
+            <a:off x="4291776" y="2465000"/>
             <a:ext cx="889984" cy="185000"/>
           </a:xfrm>
           <a:prstGeom prst="roundRect">
@@ -4653,8 +4653,8 @@
         </p:nvSpPr>
         <p:spPr>
           <a:xfrm>
-            <a:off x="426800" y="2650000"/>
-            <a:ext cx="11429840" cy="360000"/>
+            <a:off x="426800" y="2755000"/>
+            <a:ext cx="11429840" cy="395000"/>
           </a:xfrm>
           <a:prstGeom prst="rect">
             <a:avLst/>
@@ -4685,8 +4685,8 @@
         </p:nvSpPr>
         <p:spPr>
           <a:xfrm>
-            <a:off x="426800" y="2650000"/>
-            <a:ext cx="2350000" cy="360000"/>
+            <a:off x="426800" y="2755000"/>
+            <a:ext cx="2350000" cy="395000"/>
           </a:xfrm>
           <a:prstGeom prst="rect">
             <a:avLst/>
@@ -4735,7 +4735,7 @@
         </p:nvSpPr>
         <p:spPr>
           <a:xfrm>
-            <a:off x="5181760" y="2737500"/>
+            <a:off x="5181760" y="2860000"/>
             <a:ext cx="1334976" cy="185000"/>
           </a:xfrm>
           <a:prstGeom prst="roundRect">
@@ -4777,7 +4777,7 @@
         </p:nvSpPr>
         <p:spPr>
           <a:xfrm>
-            <a:off x="6516736" y="2830000"/>
+            <a:off x="6516736" y="2952500"/>
             <a:ext cx="1779968" cy="0"/>
           </a:xfrm>
           <a:prstGeom prst="line">
@@ -4812,7 +4812,7 @@
         </p:nvSpPr>
         <p:spPr>
           <a:xfrm>
-            <a:off x="8296704" y="2737500"/>
+            <a:off x="8296704" y="2860000"/>
             <a:ext cx="889984" cy="185000"/>
           </a:xfrm>
           <a:prstGeom prst="roundRect">
@@ -4854,8 +4854,8 @@
         </p:nvSpPr>
         <p:spPr>
           <a:xfrm>
-            <a:off x="426800" y="3010000"/>
-            <a:ext cx="2350000" cy="360000"/>
+            <a:off x="426800" y="3150000"/>
+            <a:ext cx="2350000" cy="395000"/>
           </a:xfrm>
           <a:prstGeom prst="rect">
             <a:avLst/>
@@ -4904,7 +4904,7 @@
         </p:nvSpPr>
         <p:spPr>
           <a:xfrm>
-            <a:off x="9186688" y="3097500"/>
+            <a:off x="9186688" y="3255000"/>
             <a:ext cx="2669952" cy="185000"/>
           </a:xfrm>
           <a:prstGeom prst="roundRect">
@@ -4946,8 +4946,8 @@
         </p:nvSpPr>
         <p:spPr>
           <a:xfrm>
-            <a:off x="426800" y="3560000"/>
-            <a:ext cx="2176240" cy="2220000"/>
+            <a:off x="426800" y="3760000"/>
+            <a:ext cx="2176240" cy="1960000"/>
           </a:xfrm>
           <a:prstGeom prst="roundRect">
             <a:avLst>
@@ -4989,7 +4989,7 @@
         </p:nvSpPr>
         <p:spPr>
           <a:xfrm>
-            <a:off x="483382" y="3560000"/>
+            <a:off x="483382" y="3760000"/>
             <a:ext cx="2063076" cy="42000"/>
           </a:xfrm>
           <a:prstGeom prst="rect">
@@ -5029,7 +5029,7 @@
         </p:nvSpPr>
         <p:spPr>
           <a:xfrm>
-            <a:off x="556800" y="3690000"/>
+            <a:off x="556800" y="3890000"/>
             <a:ext cx="340000" cy="340000"/>
           </a:xfrm>
           <a:prstGeom prst="roundRect">
@@ -5083,7 +5083,7 @@
         </p:nvSpPr>
         <p:spPr>
           <a:xfrm>
-            <a:off x="1353040" y="3745000"/>
+            <a:off x="1353040" y="3945000"/>
             <a:ext cx="1120000" cy="230000"/>
           </a:xfrm>
           <a:prstGeom prst="roundRect">
@@ -5129,7 +5129,7 @@
         </p:nvSpPr>
         <p:spPr>
           <a:xfrm>
-            <a:off x="556800" y="4105000"/>
+            <a:off x="556800" y="4305000"/>
             <a:ext cx="1916240" cy="500000"/>
           </a:xfrm>
           <a:prstGeom prst="rect">
@@ -5171,7 +5171,7 @@
         </p:nvSpPr>
         <p:spPr>
           <a:xfrm>
-            <a:off x="556800" y="4650000"/>
+            <a:off x="556800" y="4850000"/>
             <a:ext cx="1916240" cy="9525"/>
           </a:xfrm>
           <a:prstGeom prst="rect">
@@ -5203,8 +5203,8 @@
         </p:nvSpPr>
         <p:spPr>
           <a:xfrm>
-            <a:off x="556800" y="4720000"/>
-            <a:ext cx="1916240" cy="940000"/>
+            <a:off x="556800" y="4920000"/>
+            <a:ext cx="1916240" cy="680000"/>
           </a:xfrm>
           <a:prstGeom prst="rect">
             <a:avLst/>
@@ -5304,8 +5304,8 @@
         </p:nvSpPr>
         <p:spPr>
           <a:xfrm>
-            <a:off x="2740200" y="3560000"/>
-            <a:ext cx="2176240" cy="2220000"/>
+            <a:off x="2740200" y="3760000"/>
+            <a:ext cx="2176240" cy="1960000"/>
           </a:xfrm>
           <a:prstGeom prst="roundRect">
             <a:avLst>
@@ -5347,7 +5347,7 @@
         </p:nvSpPr>
         <p:spPr>
           <a:xfrm>
-            <a:off x="2796782" y="3560000"/>
+            <a:off x="2796782" y="3760000"/>
             <a:ext cx="2063076" cy="42000"/>
           </a:xfrm>
           <a:prstGeom prst="rect">
@@ -5387,7 +5387,7 @@
         </p:nvSpPr>
         <p:spPr>
           <a:xfrm>
-            <a:off x="2870200" y="3690000"/>
+            <a:off x="2870200" y="3890000"/>
             <a:ext cx="340000" cy="340000"/>
           </a:xfrm>
           <a:prstGeom prst="roundRect">
@@ -5441,7 +5441,7 @@
         </p:nvSpPr>
         <p:spPr>
           <a:xfrm>
-            <a:off x="3666440" y="3745000"/>
+            <a:off x="3666440" y="3945000"/>
             <a:ext cx="1120000" cy="230000"/>
           </a:xfrm>
           <a:prstGeom prst="roundRect">
@@ -5487,7 +5487,7 @@
         </p:nvSpPr>
         <p:spPr>
           <a:xfrm>
-            <a:off x="2870200" y="4105000"/>
+            <a:off x="2870200" y="4305000"/>
             <a:ext cx="1916240" cy="500000"/>
           </a:xfrm>
           <a:prstGeom prst="rect">
@@ -5529,7 +5529,7 @@
         </p:nvSpPr>
         <p:spPr>
           <a:xfrm>
-            <a:off x="2870200" y="4650000"/>
+            <a:off x="2870200" y="4850000"/>
             <a:ext cx="1916240" cy="9525"/>
           </a:xfrm>
           <a:prstGeom prst="rect">
@@ -5561,8 +5561,8 @@
         </p:nvSpPr>
         <p:spPr>
           <a:xfrm>
-            <a:off x="2870200" y="4720000"/>
-            <a:ext cx="1916240" cy="940000"/>
+            <a:off x="2870200" y="4920000"/>
+            <a:ext cx="1916240" cy="680000"/>
           </a:xfrm>
           <a:prstGeom prst="rect">
             <a:avLst/>
@@ -5662,8 +5662,8 @@
         </p:nvSpPr>
         <p:spPr>
           <a:xfrm>
-            <a:off x="5053600" y="3560000"/>
-            <a:ext cx="2176240" cy="2220000"/>
+            <a:off x="5053600" y="3760000"/>
+            <a:ext cx="2176240" cy="1960000"/>
           </a:xfrm>
           <a:prstGeom prst="roundRect">
             <a:avLst>
@@ -5705,7 +5705,7 @@
         </p:nvSpPr>
         <p:spPr>
           <a:xfrm>
-            <a:off x="5110182" y="3560000"/>
+            <a:off x="5110182" y="3760000"/>
             <a:ext cx="2063076" cy="42000"/>
           </a:xfrm>
           <a:prstGeom prst="rect">
@@ -5745,7 +5745,7 @@
         </p:nvSpPr>
         <p:spPr>
           <a:xfrm>
-            <a:off x="5183600" y="3690000"/>
+            <a:off x="5183600" y="3890000"/>
             <a:ext cx="340000" cy="340000"/>
           </a:xfrm>
           <a:prstGeom prst="roundRect">
@@ -5799,7 +5799,7 @@
         </p:nvSpPr>
         <p:spPr>
           <a:xfrm>
-            <a:off x="5979840" y="3745000"/>
+            <a:off x="5979840" y="3945000"/>
             <a:ext cx="1120000" cy="230000"/>
           </a:xfrm>
           <a:prstGeom prst="roundRect">
@@ -5845,7 +5845,7 @@
         </p:nvSpPr>
         <p:spPr>
           <a:xfrm>
-            <a:off x="5183600" y="4105000"/>
+            <a:off x="5183600" y="4305000"/>
             <a:ext cx="1916240" cy="500000"/>
           </a:xfrm>
           <a:prstGeom prst="rect">
@@ -5887,7 +5887,7 @@
         </p:nvSpPr>
         <p:spPr>
           <a:xfrm>
-            <a:off x="5183600" y="4650000"/>
+            <a:off x="5183600" y="4850000"/>
             <a:ext cx="1916240" cy="9525"/>
           </a:xfrm>
           <a:prstGeom prst="rect">
@@ -5919,8 +5919,8 @@
         </p:nvSpPr>
         <p:spPr>
           <a:xfrm>
-            <a:off x="5183600" y="4720000"/>
-            <a:ext cx="1916240" cy="940000"/>
+            <a:off x="5183600" y="4920000"/>
+            <a:ext cx="1916240" cy="680000"/>
           </a:xfrm>
           <a:prstGeom prst="rect">
             <a:avLst/>
@@ -6020,8 +6020,8 @@
         </p:nvSpPr>
         <p:spPr>
           <a:xfrm>
-            <a:off x="7367000" y="3560000"/>
-            <a:ext cx="2176240" cy="2220000"/>
+            <a:off x="7367000" y="3760000"/>
+            <a:ext cx="2176240" cy="1960000"/>
           </a:xfrm>
           <a:prstGeom prst="roundRect">
             <a:avLst>
@@ -6063,7 +6063,7 @@
         </p:nvSpPr>
         <p:spPr>
           <a:xfrm>
-            <a:off x="7423582" y="3560000"/>
+            <a:off x="7423582" y="3760000"/>
             <a:ext cx="2063076" cy="42000"/>
           </a:xfrm>
           <a:prstGeom prst="rect">
@@ -6103,7 +6103,7 @@
         </p:nvSpPr>
         <p:spPr>
           <a:xfrm>
-            <a:off x="7497000" y="3690000"/>
+            <a:off x="7497000" y="3890000"/>
             <a:ext cx="340000" cy="340000"/>
           </a:xfrm>
           <a:prstGeom prst="roundRect">
@@ -6157,7 +6157,7 @@
         </p:nvSpPr>
         <p:spPr>
           <a:xfrm>
-            <a:off x="8293240" y="3745000"/>
+            <a:off x="8293240" y="3945000"/>
             <a:ext cx="1120000" cy="230000"/>
           </a:xfrm>
           <a:prstGeom prst="roundRect">
@@ -6203,7 +6203,7 @@
         </p:nvSpPr>
         <p:spPr>
           <a:xfrm>
-            <a:off x="7497000" y="4105000"/>
+            <a:off x="7497000" y="4305000"/>
             <a:ext cx="1916240" cy="500000"/>
           </a:xfrm>
           <a:prstGeom prst="rect">
@@ -6245,7 +6245,7 @@
         </p:nvSpPr>
         <p:spPr>
           <a:xfrm>
-            <a:off x="7497000" y="4650000"/>
+            <a:off x="7497000" y="4850000"/>
             <a:ext cx="1916240" cy="9525"/>
           </a:xfrm>
           <a:prstGeom prst="rect">
@@ -6277,8 +6277,8 @@
         </p:nvSpPr>
         <p:spPr>
           <a:xfrm>
-            <a:off x="7497000" y="4720000"/>
-            <a:ext cx="1916240" cy="940000"/>
+            <a:off x="7497000" y="4920000"/>
+            <a:ext cx="1916240" cy="680000"/>
           </a:xfrm>
           <a:prstGeom prst="rect">
             <a:avLst/>
@@ -6351,8 +6351,8 @@
         </p:nvSpPr>
         <p:spPr>
           <a:xfrm>
-            <a:off x="9680400" y="3560000"/>
-            <a:ext cx="2176240" cy="2220000"/>
+            <a:off x="9680400" y="3760000"/>
+            <a:ext cx="2176240" cy="1960000"/>
           </a:xfrm>
           <a:prstGeom prst="roundRect">
             <a:avLst>
@@ -6394,7 +6394,7 @@
         </p:nvSpPr>
         <p:spPr>
           <a:xfrm>
-            <a:off x="9736982" y="3560000"/>
+            <a:off x="9736982" y="3760000"/>
             <a:ext cx="2063076" cy="42000"/>
           </a:xfrm>
           <a:prstGeom prst="rect">
@@ -6434,7 +6434,7 @@
         </p:nvSpPr>
         <p:spPr>
           <a:xfrm>
-            <a:off x="9810400" y="3690000"/>
+            <a:off x="9810400" y="3890000"/>
             <a:ext cx="340000" cy="340000"/>
           </a:xfrm>
           <a:prstGeom prst="roundRect">
@@ -6488,7 +6488,7 @@
         </p:nvSpPr>
         <p:spPr>
           <a:xfrm>
-            <a:off x="10606640" y="3745000"/>
+            <a:off x="10606640" y="3945000"/>
             <a:ext cx="1120000" cy="230000"/>
           </a:xfrm>
           <a:prstGeom prst="roundRect">
@@ -6534,7 +6534,7 @@
         </p:nvSpPr>
         <p:spPr>
           <a:xfrm>
-            <a:off x="9810400" y="4105000"/>
+            <a:off x="9810400" y="4305000"/>
             <a:ext cx="1916240" cy="500000"/>
           </a:xfrm>
           <a:prstGeom prst="rect">
@@ -6576,7 +6576,7 @@
         </p:nvSpPr>
         <p:spPr>
           <a:xfrm>
-            <a:off x="9810400" y="4650000"/>
+            <a:off x="9810400" y="4850000"/>
             <a:ext cx="1916240" cy="9525"/>
           </a:xfrm>
           <a:prstGeom prst="rect">
@@ -6608,8 +6608,8 @@
         </p:nvSpPr>
         <p:spPr>
           <a:xfrm>
-            <a:off x="9810400" y="4720000"/>
-            <a:ext cx="1916240" cy="940000"/>
+            <a:off x="9810400" y="4920000"/>
+            <a:ext cx="1916240" cy="680000"/>
           </a:xfrm>
           <a:prstGeom prst="rect">
             <a:avLst/>
@@ -6709,8 +6709,8 @@
         </p:nvSpPr>
         <p:spPr>
           <a:xfrm>
-            <a:off x="426800" y="5900000"/>
-            <a:ext cx="11429840" cy="500000"/>
+            <a:off x="426800" y="5880000"/>
+            <a:ext cx="11429840" cy="520000"/>
           </a:xfrm>
           <a:prstGeom prst="roundRect">
             <a:avLst>
@@ -6753,8 +6753,8 @@
         </p:nvSpPr>
         <p:spPr>
           <a:xfrm>
-            <a:off x="526800" y="6010000"/>
-            <a:ext cx="48000" cy="280000"/>
+            <a:off x="526800" y="5990000"/>
+            <a:ext cx="48000" cy="300000"/>
           </a:xfrm>
           <a:prstGeom prst="roundRect">
             <a:avLst>
@@ -6787,8 +6787,8 @@
         </p:nvSpPr>
         <p:spPr>
           <a:xfrm>
-            <a:off x="666800" y="5900000"/>
-            <a:ext cx="11029840" cy="500000"/>
+            <a:off x="666800" y="5880000"/>
+            <a:ext cx="11029840" cy="520000"/>
           </a:xfrm>
           <a:prstGeom prst="rect">
             <a:avLst/>
